--- a/Shopkart_Demo.pptx
+++ b/Shopkart_Demo.pptx
@@ -5,21 +5,20 @@
     <p:sldMasterId id="2147483725" r:id="rId1"/>
   </p:sldMasterIdLst>
   <p:notesMasterIdLst>
-    <p:notesMasterId r:id="rId14"/>
+    <p:notesMasterId r:id="rId13"/>
   </p:notesMasterIdLst>
   <p:sldIdLst>
     <p:sldId id="256" r:id="rId2"/>
     <p:sldId id="257" r:id="rId3"/>
     <p:sldId id="268" r:id="rId4"/>
-    <p:sldId id="258" r:id="rId5"/>
-    <p:sldId id="259" r:id="rId6"/>
-    <p:sldId id="266" r:id="rId7"/>
-    <p:sldId id="267" r:id="rId8"/>
-    <p:sldId id="260" r:id="rId9"/>
-    <p:sldId id="261" r:id="rId10"/>
-    <p:sldId id="263" r:id="rId11"/>
-    <p:sldId id="264" r:id="rId12"/>
-    <p:sldId id="265" r:id="rId13"/>
+    <p:sldId id="259" r:id="rId5"/>
+    <p:sldId id="266" r:id="rId6"/>
+    <p:sldId id="267" r:id="rId7"/>
+    <p:sldId id="260" r:id="rId8"/>
+    <p:sldId id="261" r:id="rId9"/>
+    <p:sldId id="263" r:id="rId10"/>
+    <p:sldId id="264" r:id="rId11"/>
+    <p:sldId id="265" r:id="rId12"/>
   </p:sldIdLst>
   <p:sldSz cx="12192000" cy="6858000"/>
   <p:notesSz cx="6858000" cy="12192000"/>
@@ -568,7 +567,7 @@
           <a:p>
             <a:fld id="{F7021451-1387-4CA6-816F-3879F97B5CBC}" type="slidenum">
               <a:rPr lang="en-US"/>
-              <a:t>5</a:t>
+              <a:t>7</a:t>
             </a:fld>
             <a:endParaRPr lang="en-US"/>
           </a:p>
@@ -905,90 +904,6 @@
             <a:fld id="{F7021451-1387-4CA6-816F-3879F97B5CBC}" type="slidenum">
               <a:rPr lang="en-US"/>
               <a:t>11</a:t>
-            </a:fld>
-            <a:endParaRPr lang="en-US"/>
-          </a:p>
-        </p:txBody>
-      </p:sp>
-    </p:spTree>
-    <p:extLst>
-      <p:ext uri="{BB962C8B-B14F-4D97-AF65-F5344CB8AC3E}">
-        <p14:creationId xmlns:p14="http://schemas.microsoft.com/office/powerpoint/2010/main" val="1024086991"/>
-      </p:ext>
-    </p:extLst>
-  </p:cSld>
-  <p:clrMapOvr>
-    <a:masterClrMapping/>
-  </p:clrMapOvr>
-</p:notes>
-</file>
-
-<file path=ppt/notesSlides/notesSlide9.xml><?xml version="1.0" encoding="utf-8"?>
-<p:notes xmlns:a="http://schemas.openxmlformats.org/drawingml/2006/main" xmlns:r="http://schemas.openxmlformats.org/officeDocument/2006/relationships" xmlns:p="http://schemas.openxmlformats.org/presentationml/2006/main">
-  <p:cSld>
-    <p:spTree>
-      <p:nvGrpSpPr>
-        <p:cNvPr id="1" name=""/>
-        <p:cNvGrpSpPr/>
-        <p:nvPr/>
-      </p:nvGrpSpPr>
-      <p:grpSpPr>
-        <a:xfrm>
-          <a:off x="0" y="0"/>
-          <a:ext cx="0" cy="0"/>
-          <a:chOff x="0" y="0"/>
-          <a:chExt cx="0" cy="0"/>
-        </a:xfrm>
-      </p:grpSpPr>
-      <p:sp>
-        <p:nvSpPr>
-          <p:cNvPr id="2" name="Slide Image Placeholder 1"/>
-          <p:cNvSpPr>
-            <a:spLocks noGrp="1" noRot="1" noChangeAspect="1"/>
-          </p:cNvSpPr>
-          <p:nvPr>
-            <p:ph type="sldImg"/>
-          </p:nvPr>
-        </p:nvSpPr>
-        <p:spPr/>
-      </p:sp>
-      <p:sp>
-        <p:nvSpPr>
-          <p:cNvPr id="3" name="Notes Placeholder 2"/>
-          <p:cNvSpPr>
-            <a:spLocks noGrp="1"/>
-          </p:cNvSpPr>
-          <p:nvPr>
-            <p:ph type="body" idx="1"/>
-          </p:nvPr>
-        </p:nvSpPr>
-        <p:spPr/>
-        <p:txBody>
-          <a:bodyPr/>
-          <a:lstStyle/>
-          <a:p>
-            <a:endParaRPr lang="en-US" dirty="0"/>
-          </a:p>
-        </p:txBody>
-      </p:sp>
-      <p:sp>
-        <p:nvSpPr>
-          <p:cNvPr id="4" name="Slide Number Placeholder 3"/>
-          <p:cNvSpPr>
-            <a:spLocks noGrp="1"/>
-          </p:cNvSpPr>
-          <p:nvPr>
-            <p:ph type="sldNum" sz="quarter" idx="10"/>
-          </p:nvPr>
-        </p:nvSpPr>
-        <p:spPr/>
-        <p:txBody>
-          <a:bodyPr/>
-          <a:lstStyle/>
-          <a:p>
-            <a:fld id="{F7021451-1387-4CA6-816F-3879F97B5CBC}" type="slidenum">
-              <a:rPr lang="en-US"/>
-              <a:t>12</a:t>
             </a:fld>
             <a:endParaRPr lang="en-US"/>
           </a:p>
@@ -4811,7 +4726,7 @@
       </p:sp>
       <p:sp>
         <p:nvSpPr>
-          <p:cNvPr id="15" name="Shape 13"/>
+          <p:cNvPr id="16" name="Text 14"/>
           <p:cNvSpPr/>
           <p:nvPr/>
         </p:nvSpPr>
@@ -4819,6 +4734,34 @@
           <a:xfrm>
             <a:off x="6761988" y="5212080"/>
             <a:ext cx="1298448" cy="420624"/>
+          </a:xfrm>
+          <a:prstGeom prst="rect">
+            <a:avLst/>
+          </a:prstGeom>
+          <a:noFill/>
+          <a:ln/>
+        </p:spPr>
+        <p:txBody>
+          <a:bodyPr wrap="square" lIns="0" tIns="0" rIns="0" bIns="0" rtlCol="0" anchor="ctr"/>
+          <a:lstStyle/>
+          <a:p>
+            <a:pPr marL="0" indent="0" algn="ctr">
+              <a:buNone/>
+            </a:pPr>
+            <a:endParaRPr lang="en-US" sz="1150" dirty="0"/>
+          </a:p>
+        </p:txBody>
+      </p:sp>
+      <p:sp>
+        <p:nvSpPr>
+          <p:cNvPr id="17" name="Shape 15"/>
+          <p:cNvSpPr/>
+          <p:nvPr/>
+        </p:nvSpPr>
+        <p:spPr>
+          <a:xfrm>
+            <a:off x="6771132" y="5202936"/>
+            <a:ext cx="1472184" cy="420624"/>
           </a:xfrm>
           <a:prstGeom prst="roundRect">
             <a:avLst>
@@ -4845,86 +4788,13 @@
       </p:sp>
       <p:sp>
         <p:nvSpPr>
-          <p:cNvPr id="16" name="Text 14"/>
-          <p:cNvSpPr/>
-          <p:nvPr/>
-        </p:nvSpPr>
-        <p:spPr>
-          <a:xfrm>
-            <a:off x="6761988" y="5212080"/>
-            <a:ext cx="1298448" cy="420624"/>
-          </a:xfrm>
-          <a:prstGeom prst="rect">
-            <a:avLst/>
-          </a:prstGeom>
-          <a:noFill/>
-          <a:ln/>
-        </p:spPr>
-        <p:txBody>
-          <a:bodyPr wrap="square" lIns="0" tIns="0" rIns="0" bIns="0" rtlCol="0" anchor="ctr"/>
-          <a:lstStyle/>
-          <a:p>
-            <a:pPr marL="0" indent="0" algn="ctr">
-              <a:buNone/>
-            </a:pPr>
-            <a:r>
-              <a:rPr lang="en-US" sz="1150" b="1" dirty="0">
-                <a:solidFill>
-                  <a:srgbClr val="CADCFC"/>
-                </a:solidFill>
-                <a:latin typeface="Calibri" pitchFamily="34" charset="0"/>
-                <a:ea typeface="Calibri" pitchFamily="34" charset="-122"/>
-                <a:cs typeface="Calibri" pitchFamily="34" charset="-120"/>
-              </a:rPr>
-              <a:t>Extent Spark</a:t>
-            </a:r>
-            <a:endParaRPr lang="en-US" sz="1150" dirty="0"/>
-          </a:p>
-        </p:txBody>
-      </p:sp>
-      <p:sp>
-        <p:nvSpPr>
-          <p:cNvPr id="17" name="Shape 15"/>
-          <p:cNvSpPr/>
-          <p:nvPr/>
-        </p:nvSpPr>
-        <p:spPr>
-          <a:xfrm>
-            <a:off x="8225028" y="5212080"/>
-            <a:ext cx="1472184" cy="420624"/>
-          </a:xfrm>
-          <a:prstGeom prst="roundRect">
-            <a:avLst>
-              <a:gd name="adj" fmla="val 17391"/>
-            </a:avLst>
-          </a:prstGeom>
-          <a:solidFill>
-            <a:srgbClr val="141B4D"/>
-          </a:solidFill>
-          <a:ln w="12700">
-            <a:solidFill>
-              <a:srgbClr val="F2C14E"/>
-            </a:solidFill>
-            <a:prstDash val="solid"/>
-          </a:ln>
-        </p:spPr>
-        <p:txBody>
-          <a:bodyPr/>
-          <a:lstStyle/>
-          <a:p>
-            <a:endParaRPr lang="en-IN"/>
-          </a:p>
-        </p:txBody>
-      </p:sp>
-      <p:sp>
-        <p:nvSpPr>
           <p:cNvPr id="18" name="Text 16"/>
           <p:cNvSpPr/>
           <p:nvPr/>
         </p:nvSpPr>
         <p:spPr>
           <a:xfrm>
-            <a:off x="8225028" y="5212080"/>
+            <a:off x="6761988" y="5202936"/>
             <a:ext cx="1472184" cy="420624"/>
           </a:xfrm>
           <a:prstGeom prst="rect">
@@ -4992,1257 +4862,6 @@
 </file>
 
 <file path=ppt/slides/slide10.xml><?xml version="1.0" encoding="utf-8"?>
-<p:sld xmlns:a="http://schemas.openxmlformats.org/drawingml/2006/main" xmlns:r="http://schemas.openxmlformats.org/officeDocument/2006/relationships" xmlns:p="http://schemas.openxmlformats.org/presentationml/2006/main">
-  <p:cSld name="Slide 8">
-    <p:bg>
-      <p:bgPr>
-        <a:solidFill>
-          <a:srgbClr val="FFFFFF"/>
-        </a:solidFill>
-        <a:effectLst/>
-      </p:bgPr>
-    </p:bg>
-    <p:spTree>
-      <p:nvGrpSpPr>
-        <p:cNvPr id="1" name=""/>
-        <p:cNvGrpSpPr/>
-        <p:nvPr/>
-      </p:nvGrpSpPr>
-      <p:grpSpPr>
-        <a:xfrm>
-          <a:off x="0" y="0"/>
-          <a:ext cx="0" cy="0"/>
-          <a:chOff x="0" y="0"/>
-          <a:chExt cx="0" cy="0"/>
-        </a:xfrm>
-      </p:grpSpPr>
-      <p:sp>
-        <p:nvSpPr>
-          <p:cNvPr id="2" name="Text 0"/>
-          <p:cNvSpPr/>
-          <p:nvPr/>
-        </p:nvSpPr>
-        <p:spPr>
-          <a:xfrm>
-            <a:off x="548640" y="384048"/>
-            <a:ext cx="9144000" cy="320040"/>
-          </a:xfrm>
-          <a:prstGeom prst="rect">
-            <a:avLst/>
-          </a:prstGeom>
-          <a:noFill/>
-          <a:ln/>
-        </p:spPr>
-        <p:txBody>
-          <a:bodyPr wrap="square" rtlCol="0" anchor="ctr"/>
-          <a:lstStyle/>
-          <a:p>
-            <a:pPr marL="0" indent="0">
-              <a:buNone/>
-            </a:pPr>
-            <a:r>
-              <a:rPr lang="en-US" sz="1300" b="1" kern="0" spc="200" dirty="0">
-                <a:solidFill>
-                  <a:srgbClr val="1E2761"/>
-                </a:solidFill>
-                <a:latin typeface="Calibri" pitchFamily="34" charset="0"/>
-                <a:ea typeface="Calibri" pitchFamily="34" charset="-122"/>
-                <a:cs typeface="Calibri" pitchFamily="34" charset="-120"/>
-              </a:rPr>
-              <a:t>GITHUB ACTIONS</a:t>
-            </a:r>
-            <a:endParaRPr lang="en-US" sz="1300" dirty="0"/>
-          </a:p>
-        </p:txBody>
-      </p:sp>
-      <p:sp>
-        <p:nvSpPr>
-          <p:cNvPr id="3" name="Text 1"/>
-          <p:cNvSpPr/>
-          <p:nvPr/>
-        </p:nvSpPr>
-        <p:spPr>
-          <a:xfrm>
-            <a:off x="548640" y="685800"/>
-            <a:ext cx="11064240" cy="777240"/>
-          </a:xfrm>
-          <a:prstGeom prst="rect">
-            <a:avLst/>
-          </a:prstGeom>
-          <a:noFill/>
-          <a:ln/>
-        </p:spPr>
-        <p:txBody>
-          <a:bodyPr wrap="square" rtlCol="0" anchor="ctr"/>
-          <a:lstStyle/>
-          <a:p>
-            <a:pPr marL="0" indent="0">
-              <a:buNone/>
-            </a:pPr>
-            <a:r>
-              <a:rPr lang="en-US" sz="3200" b="1" dirty="0">
-                <a:solidFill>
-                  <a:srgbClr val="1E2761"/>
-                </a:solidFill>
-                <a:latin typeface="Cambria" pitchFamily="34" charset="0"/>
-                <a:ea typeface="Cambria" pitchFamily="34" charset="-122"/>
-                <a:cs typeface="Cambria" pitchFamily="34" charset="-120"/>
-              </a:rPr>
-              <a:t>From Push To Published Report</a:t>
-            </a:r>
-            <a:endParaRPr lang="en-US" sz="3200" dirty="0"/>
-          </a:p>
-        </p:txBody>
-      </p:sp>
-      <p:sp>
-        <p:nvSpPr>
-          <p:cNvPr id="4" name="Shape 2"/>
-          <p:cNvSpPr/>
-          <p:nvPr/>
-        </p:nvSpPr>
-        <p:spPr>
-          <a:xfrm>
-            <a:off x="548640" y="1783080"/>
-            <a:ext cx="1691640" cy="1143000"/>
-          </a:xfrm>
-          <a:prstGeom prst="roundRect">
-            <a:avLst>
-              <a:gd name="adj" fmla="val 8000"/>
-            </a:avLst>
-          </a:prstGeom>
-          <a:solidFill>
-            <a:srgbClr val="F4F7FC"/>
-          </a:solidFill>
-          <a:ln w="19050">
-            <a:solidFill>
-              <a:srgbClr val="1E2761"/>
-            </a:solidFill>
-            <a:prstDash val="solid"/>
-          </a:ln>
-        </p:spPr>
-        <p:txBody>
-          <a:bodyPr/>
-          <a:lstStyle/>
-          <a:p>
-            <a:endParaRPr lang="en-IN"/>
-          </a:p>
-        </p:txBody>
-      </p:sp>
-      <p:sp>
-        <p:nvSpPr>
-          <p:cNvPr id="5" name="Text 3"/>
-          <p:cNvSpPr/>
-          <p:nvPr/>
-        </p:nvSpPr>
-        <p:spPr>
-          <a:xfrm>
-            <a:off x="548640" y="1783080"/>
-            <a:ext cx="1691640" cy="1143000"/>
-          </a:xfrm>
-          <a:prstGeom prst="rect">
-            <a:avLst/>
-          </a:prstGeom>
-          <a:noFill/>
-          <a:ln/>
-        </p:spPr>
-        <p:txBody>
-          <a:bodyPr wrap="square" lIns="0" tIns="0" rIns="0" bIns="0" rtlCol="0" anchor="ctr"/>
-          <a:lstStyle/>
-          <a:p>
-            <a:pPr marL="0" indent="0" algn="ctr">
-              <a:lnSpc>
-                <a:spcPct val="115000"/>
-              </a:lnSpc>
-              <a:buNone/>
-            </a:pPr>
-            <a:r>
-              <a:rPr lang="en-US" sz="1100" b="1" dirty="0">
-                <a:solidFill>
-                  <a:srgbClr val="1E2761"/>
-                </a:solidFill>
-                <a:latin typeface="Calibri" pitchFamily="34" charset="0"/>
-                <a:ea typeface="Calibri" pitchFamily="34" charset="-122"/>
-                <a:cs typeface="Calibri" pitchFamily="34" charset="-120"/>
-              </a:rPr>
-              <a:t>Checkout +</a:t>
-            </a:r>
-            <a:endParaRPr lang="en-US" sz="1100" dirty="0"/>
-          </a:p>
-          <a:p>
-            <a:pPr marL="0" indent="0" algn="ctr">
-              <a:lnSpc>
-                <a:spcPct val="115000"/>
-              </a:lnSpc>
-              <a:buNone/>
-            </a:pPr>
-            <a:r>
-              <a:rPr lang="en-US" sz="1100" b="1" dirty="0">
-                <a:solidFill>
-                  <a:srgbClr val="1E2761"/>
-                </a:solidFill>
-                <a:latin typeface="Calibri" pitchFamily="34" charset="0"/>
-                <a:ea typeface="Calibri" pitchFamily="34" charset="-122"/>
-                <a:cs typeface="Calibri" pitchFamily="34" charset="-120"/>
-              </a:rPr>
-              <a:t>Setup JDK 22</a:t>
-            </a:r>
-            <a:endParaRPr lang="en-US" sz="1100" dirty="0"/>
-          </a:p>
-        </p:txBody>
-      </p:sp>
-      <p:sp>
-        <p:nvSpPr>
-          <p:cNvPr id="6" name="Text 4"/>
-          <p:cNvSpPr/>
-          <p:nvPr/>
-        </p:nvSpPr>
-        <p:spPr>
-          <a:xfrm>
-            <a:off x="2221992" y="1764792"/>
-            <a:ext cx="225491" cy="1143000"/>
-          </a:xfrm>
-          <a:prstGeom prst="rect">
-            <a:avLst/>
-          </a:prstGeom>
-          <a:noFill/>
-          <a:ln/>
-        </p:spPr>
-        <p:txBody>
-          <a:bodyPr wrap="square" lIns="0" tIns="0" rIns="0" bIns="0" rtlCol="0" anchor="ctr"/>
-          <a:lstStyle/>
-          <a:p>
-            <a:pPr marL="0" indent="0" algn="ctr">
-              <a:buNone/>
-            </a:pPr>
-            <a:r>
-              <a:rPr lang="en-US" sz="1800" b="1" dirty="0">
-                <a:solidFill>
-                  <a:srgbClr val="5A6B87"/>
-                </a:solidFill>
-                <a:latin typeface="Arial" pitchFamily="34" charset="0"/>
-                <a:ea typeface="Arial" pitchFamily="34" charset="-122"/>
-                <a:cs typeface="Arial" pitchFamily="34" charset="-120"/>
-              </a:rPr>
-              <a:t>→</a:t>
-            </a:r>
-            <a:endParaRPr lang="en-US" sz="1800" dirty="0"/>
-          </a:p>
-        </p:txBody>
-      </p:sp>
-      <p:sp>
-        <p:nvSpPr>
-          <p:cNvPr id="7" name="Shape 5"/>
-          <p:cNvSpPr/>
-          <p:nvPr/>
-        </p:nvSpPr>
-        <p:spPr>
-          <a:xfrm>
-            <a:off x="2429195" y="1783080"/>
-            <a:ext cx="1691640" cy="1143000"/>
-          </a:xfrm>
-          <a:prstGeom prst="roundRect">
-            <a:avLst>
-              <a:gd name="adj" fmla="val 8000"/>
-            </a:avLst>
-          </a:prstGeom>
-          <a:solidFill>
-            <a:srgbClr val="F4F7FC"/>
-          </a:solidFill>
-          <a:ln w="19050">
-            <a:solidFill>
-              <a:srgbClr val="1E2761"/>
-            </a:solidFill>
-            <a:prstDash val="solid"/>
-          </a:ln>
-        </p:spPr>
-        <p:txBody>
-          <a:bodyPr/>
-          <a:lstStyle/>
-          <a:p>
-            <a:endParaRPr lang="en-IN"/>
-          </a:p>
-        </p:txBody>
-      </p:sp>
-      <p:sp>
-        <p:nvSpPr>
-          <p:cNvPr id="8" name="Text 6"/>
-          <p:cNvSpPr/>
-          <p:nvPr/>
-        </p:nvSpPr>
-        <p:spPr>
-          <a:xfrm>
-            <a:off x="2429195" y="1783080"/>
-            <a:ext cx="1691640" cy="1143000"/>
-          </a:xfrm>
-          <a:prstGeom prst="rect">
-            <a:avLst/>
-          </a:prstGeom>
-          <a:noFill/>
-          <a:ln/>
-        </p:spPr>
-        <p:txBody>
-          <a:bodyPr wrap="square" lIns="0" tIns="0" rIns="0" bIns="0" rtlCol="0" anchor="ctr"/>
-          <a:lstStyle/>
-          <a:p>
-            <a:pPr marL="0" indent="0" algn="ctr">
-              <a:lnSpc>
-                <a:spcPct val="115000"/>
-              </a:lnSpc>
-              <a:buNone/>
-            </a:pPr>
-            <a:r>
-              <a:rPr lang="en-US" sz="1100" b="1" dirty="0">
-                <a:solidFill>
-                  <a:srgbClr val="1E2761"/>
-                </a:solidFill>
-                <a:latin typeface="Calibri" pitchFamily="34" charset="0"/>
-                <a:ea typeface="Calibri" pitchFamily="34" charset="-122"/>
-                <a:cs typeface="Calibri" pitchFamily="34" charset="-120"/>
-              </a:rPr>
-              <a:t>Start MySQL</a:t>
-            </a:r>
-            <a:endParaRPr lang="en-US" sz="1100" dirty="0"/>
-          </a:p>
-          <a:p>
-            <a:pPr marL="0" indent="0" algn="ctr">
-              <a:lnSpc>
-                <a:spcPct val="115000"/>
-              </a:lnSpc>
-              <a:buNone/>
-            </a:pPr>
-            <a:r>
-              <a:rPr lang="en-US" sz="1100" b="1" dirty="0">
-                <a:solidFill>
-                  <a:srgbClr val="1E2761"/>
-                </a:solidFill>
-                <a:latin typeface="Calibri" pitchFamily="34" charset="0"/>
-                <a:ea typeface="Calibri" pitchFamily="34" charset="-122"/>
-                <a:cs typeface="Calibri" pitchFamily="34" charset="-120"/>
-              </a:rPr>
-              <a:t>Service</a:t>
-            </a:r>
-            <a:endParaRPr lang="en-US" sz="1100" dirty="0"/>
-          </a:p>
-        </p:txBody>
-      </p:sp>
-      <p:sp>
-        <p:nvSpPr>
-          <p:cNvPr id="9" name="Text 7"/>
-          <p:cNvSpPr/>
-          <p:nvPr/>
-        </p:nvSpPr>
-        <p:spPr>
-          <a:xfrm>
-            <a:off x="4102547" y="1764792"/>
-            <a:ext cx="225491" cy="1143000"/>
-          </a:xfrm>
-          <a:prstGeom prst="rect">
-            <a:avLst/>
-          </a:prstGeom>
-          <a:noFill/>
-          <a:ln/>
-        </p:spPr>
-        <p:txBody>
-          <a:bodyPr wrap="square" lIns="0" tIns="0" rIns="0" bIns="0" rtlCol="0" anchor="ctr"/>
-          <a:lstStyle/>
-          <a:p>
-            <a:pPr marL="0" indent="0" algn="ctr">
-              <a:buNone/>
-            </a:pPr>
-            <a:r>
-              <a:rPr lang="en-US" sz="1800" b="1" dirty="0">
-                <a:solidFill>
-                  <a:srgbClr val="5A6B87"/>
-                </a:solidFill>
-                <a:latin typeface="Arial" pitchFamily="34" charset="0"/>
-                <a:ea typeface="Arial" pitchFamily="34" charset="-122"/>
-                <a:cs typeface="Arial" pitchFamily="34" charset="-120"/>
-              </a:rPr>
-              <a:t>→</a:t>
-            </a:r>
-            <a:endParaRPr lang="en-US" sz="1800" dirty="0"/>
-          </a:p>
-        </p:txBody>
-      </p:sp>
-      <p:sp>
-        <p:nvSpPr>
-          <p:cNvPr id="10" name="Shape 8"/>
-          <p:cNvSpPr/>
-          <p:nvPr/>
-        </p:nvSpPr>
-        <p:spPr>
-          <a:xfrm>
-            <a:off x="4309750" y="1783080"/>
-            <a:ext cx="1691640" cy="1143000"/>
-          </a:xfrm>
-          <a:prstGeom prst="roundRect">
-            <a:avLst>
-              <a:gd name="adj" fmla="val 8000"/>
-            </a:avLst>
-          </a:prstGeom>
-          <a:solidFill>
-            <a:srgbClr val="F4F7FC"/>
-          </a:solidFill>
-          <a:ln w="19050">
-            <a:solidFill>
-              <a:srgbClr val="F2C14E"/>
-            </a:solidFill>
-            <a:prstDash val="solid"/>
-          </a:ln>
-        </p:spPr>
-        <p:txBody>
-          <a:bodyPr/>
-          <a:lstStyle/>
-          <a:p>
-            <a:endParaRPr lang="en-IN"/>
-          </a:p>
-        </p:txBody>
-      </p:sp>
-      <p:sp>
-        <p:nvSpPr>
-          <p:cNvPr id="11" name="Text 9"/>
-          <p:cNvSpPr/>
-          <p:nvPr/>
-        </p:nvSpPr>
-        <p:spPr>
-          <a:xfrm>
-            <a:off x="4309750" y="1783080"/>
-            <a:ext cx="1691640" cy="1143000"/>
-          </a:xfrm>
-          <a:prstGeom prst="rect">
-            <a:avLst/>
-          </a:prstGeom>
-          <a:noFill/>
-          <a:ln/>
-        </p:spPr>
-        <p:txBody>
-          <a:bodyPr wrap="square" lIns="0" tIns="0" rIns="0" bIns="0" rtlCol="0" anchor="ctr"/>
-          <a:lstStyle/>
-          <a:p>
-            <a:pPr marL="0" indent="0" algn="ctr">
-              <a:lnSpc>
-                <a:spcPct val="115000"/>
-              </a:lnSpc>
-              <a:buNone/>
-            </a:pPr>
-            <a:r>
-              <a:rPr lang="en-US" sz="1100" b="1" dirty="0">
-                <a:solidFill>
-                  <a:srgbClr val="1E2761"/>
-                </a:solidFill>
-                <a:latin typeface="Calibri" pitchFamily="34" charset="0"/>
-                <a:ea typeface="Calibri" pitchFamily="34" charset="-122"/>
-                <a:cs typeface="Calibri" pitchFamily="34" charset="-120"/>
-              </a:rPr>
-              <a:t>./gradlew test</a:t>
-            </a:r>
-            <a:endParaRPr lang="en-US" sz="1100" dirty="0"/>
-          </a:p>
-          <a:p>
-            <a:pPr marL="0" indent="0" algn="ctr">
-              <a:lnSpc>
-                <a:spcPct val="115000"/>
-              </a:lnSpc>
-              <a:buNone/>
-            </a:pPr>
-            <a:r>
-              <a:rPr lang="en-US" sz="1100" b="1" dirty="0">
-                <a:solidFill>
-                  <a:srgbClr val="1E2761"/>
-                </a:solidFill>
-                <a:latin typeface="Calibri" pitchFamily="34" charset="0"/>
-                <a:ea typeface="Calibri" pitchFamily="34" charset="-122"/>
-                <a:cs typeface="Calibri" pitchFamily="34" charset="-120"/>
-              </a:rPr>
-              <a:t>(maxParallelForks=1)</a:t>
-            </a:r>
-            <a:endParaRPr lang="en-US" sz="1100" dirty="0"/>
-          </a:p>
-        </p:txBody>
-      </p:sp>
-      <p:sp>
-        <p:nvSpPr>
-          <p:cNvPr id="12" name="Text 10"/>
-          <p:cNvSpPr/>
-          <p:nvPr/>
-        </p:nvSpPr>
-        <p:spPr>
-          <a:xfrm>
-            <a:off x="5983102" y="1764792"/>
-            <a:ext cx="225491" cy="1143000"/>
-          </a:xfrm>
-          <a:prstGeom prst="rect">
-            <a:avLst/>
-          </a:prstGeom>
-          <a:noFill/>
-          <a:ln/>
-        </p:spPr>
-        <p:txBody>
-          <a:bodyPr wrap="square" lIns="0" tIns="0" rIns="0" bIns="0" rtlCol="0" anchor="ctr"/>
-          <a:lstStyle/>
-          <a:p>
-            <a:pPr marL="0" indent="0" algn="ctr">
-              <a:buNone/>
-            </a:pPr>
-            <a:r>
-              <a:rPr lang="en-US" sz="1800" b="1" dirty="0">
-                <a:solidFill>
-                  <a:srgbClr val="5A6B87"/>
-                </a:solidFill>
-                <a:latin typeface="Arial" pitchFamily="34" charset="0"/>
-                <a:ea typeface="Arial" pitchFamily="34" charset="-122"/>
-                <a:cs typeface="Arial" pitchFamily="34" charset="-120"/>
-              </a:rPr>
-              <a:t>→</a:t>
-            </a:r>
-            <a:endParaRPr lang="en-US" sz="1800" dirty="0"/>
-          </a:p>
-        </p:txBody>
-      </p:sp>
-      <p:sp>
-        <p:nvSpPr>
-          <p:cNvPr id="13" name="Shape 11"/>
-          <p:cNvSpPr/>
-          <p:nvPr/>
-        </p:nvSpPr>
-        <p:spPr>
-          <a:xfrm>
-            <a:off x="6190305" y="1783080"/>
-            <a:ext cx="1691640" cy="1143000"/>
-          </a:xfrm>
-          <a:prstGeom prst="roundRect">
-            <a:avLst>
-              <a:gd name="adj" fmla="val 8000"/>
-            </a:avLst>
-          </a:prstGeom>
-          <a:solidFill>
-            <a:srgbClr val="F4F7FC"/>
-          </a:solidFill>
-          <a:ln w="19050">
-            <a:solidFill>
-              <a:srgbClr val="F2C14E"/>
-            </a:solidFill>
-            <a:prstDash val="solid"/>
-          </a:ln>
-        </p:spPr>
-        <p:txBody>
-          <a:bodyPr/>
-          <a:lstStyle/>
-          <a:p>
-            <a:endParaRPr lang="en-IN"/>
-          </a:p>
-        </p:txBody>
-      </p:sp>
-      <p:sp>
-        <p:nvSpPr>
-          <p:cNvPr id="14" name="Text 12"/>
-          <p:cNvSpPr/>
-          <p:nvPr/>
-        </p:nvSpPr>
-        <p:spPr>
-          <a:xfrm>
-            <a:off x="6190305" y="1783080"/>
-            <a:ext cx="1691640" cy="1143000"/>
-          </a:xfrm>
-          <a:prstGeom prst="rect">
-            <a:avLst/>
-          </a:prstGeom>
-          <a:noFill/>
-          <a:ln/>
-        </p:spPr>
-        <p:txBody>
-          <a:bodyPr wrap="square" lIns="0" tIns="0" rIns="0" bIns="0" rtlCol="0" anchor="ctr"/>
-          <a:lstStyle/>
-          <a:p>
-            <a:pPr marL="0" indent="0" algn="ctr">
-              <a:lnSpc>
-                <a:spcPct val="115000"/>
-              </a:lnSpc>
-              <a:buNone/>
-            </a:pPr>
-            <a:r>
-              <a:rPr lang="en-US" sz="1100" b="1" dirty="0">
-                <a:solidFill>
-                  <a:srgbClr val="1E2761"/>
-                </a:solidFill>
-                <a:latin typeface="Calibri" pitchFamily="34" charset="0"/>
-                <a:ea typeface="Calibri" pitchFamily="34" charset="-122"/>
-                <a:cs typeface="Calibri" pitchFamily="34" charset="-120"/>
-              </a:rPr>
-              <a:t>Verify Allure</a:t>
-            </a:r>
-            <a:endParaRPr lang="en-US" sz="1100" dirty="0"/>
-          </a:p>
-          <a:p>
-            <a:pPr marL="0" indent="0" algn="ctr">
-              <a:lnSpc>
-                <a:spcPct val="115000"/>
-              </a:lnSpc>
-              <a:buNone/>
-            </a:pPr>
-            <a:r>
-              <a:rPr lang="en-US" sz="1100" b="1" dirty="0">
-                <a:solidFill>
-                  <a:srgbClr val="1E2761"/>
-                </a:solidFill>
-                <a:latin typeface="Calibri" pitchFamily="34" charset="0"/>
-                <a:ea typeface="Calibri" pitchFamily="34" charset="-122"/>
-                <a:cs typeface="Calibri" pitchFamily="34" charset="-120"/>
-              </a:rPr>
-              <a:t>Results Exist</a:t>
-            </a:r>
-            <a:endParaRPr lang="en-US" sz="1100" dirty="0"/>
-          </a:p>
-        </p:txBody>
-      </p:sp>
-      <p:sp>
-        <p:nvSpPr>
-          <p:cNvPr id="15" name="Text 13"/>
-          <p:cNvSpPr/>
-          <p:nvPr/>
-        </p:nvSpPr>
-        <p:spPr>
-          <a:xfrm>
-            <a:off x="7863657" y="1764792"/>
-            <a:ext cx="225491" cy="1143000"/>
-          </a:xfrm>
-          <a:prstGeom prst="rect">
-            <a:avLst/>
-          </a:prstGeom>
-          <a:noFill/>
-          <a:ln/>
-        </p:spPr>
-        <p:txBody>
-          <a:bodyPr wrap="square" lIns="0" tIns="0" rIns="0" bIns="0" rtlCol="0" anchor="ctr"/>
-          <a:lstStyle/>
-          <a:p>
-            <a:pPr marL="0" indent="0" algn="ctr">
-              <a:buNone/>
-            </a:pPr>
-            <a:r>
-              <a:rPr lang="en-US" sz="1800" b="1" dirty="0">
-                <a:solidFill>
-                  <a:srgbClr val="5A6B87"/>
-                </a:solidFill>
-                <a:latin typeface="Arial" pitchFamily="34" charset="0"/>
-                <a:ea typeface="Arial" pitchFamily="34" charset="-122"/>
-                <a:cs typeface="Arial" pitchFamily="34" charset="-120"/>
-              </a:rPr>
-              <a:t>→</a:t>
-            </a:r>
-            <a:endParaRPr lang="en-US" sz="1800" dirty="0"/>
-          </a:p>
-        </p:txBody>
-      </p:sp>
-      <p:sp>
-        <p:nvSpPr>
-          <p:cNvPr id="16" name="Shape 14"/>
-          <p:cNvSpPr/>
-          <p:nvPr/>
-        </p:nvSpPr>
-        <p:spPr>
-          <a:xfrm>
-            <a:off x="8070860" y="1783080"/>
-            <a:ext cx="1691640" cy="1143000"/>
-          </a:xfrm>
-          <a:prstGeom prst="roundRect">
-            <a:avLst>
-              <a:gd name="adj" fmla="val 8000"/>
-            </a:avLst>
-          </a:prstGeom>
-          <a:solidFill>
-            <a:srgbClr val="F4F7FC"/>
-          </a:solidFill>
-          <a:ln w="19050">
-            <a:solidFill>
-              <a:srgbClr val="2FA36B"/>
-            </a:solidFill>
-            <a:prstDash val="solid"/>
-          </a:ln>
-        </p:spPr>
-        <p:txBody>
-          <a:bodyPr/>
-          <a:lstStyle/>
-          <a:p>
-            <a:endParaRPr lang="en-IN"/>
-          </a:p>
-        </p:txBody>
-      </p:sp>
-      <p:sp>
-        <p:nvSpPr>
-          <p:cNvPr id="17" name="Text 15"/>
-          <p:cNvSpPr/>
-          <p:nvPr/>
-        </p:nvSpPr>
-        <p:spPr>
-          <a:xfrm>
-            <a:off x="8070860" y="1783080"/>
-            <a:ext cx="1691640" cy="1143000"/>
-          </a:xfrm>
-          <a:prstGeom prst="rect">
-            <a:avLst/>
-          </a:prstGeom>
-          <a:noFill/>
-          <a:ln/>
-        </p:spPr>
-        <p:txBody>
-          <a:bodyPr wrap="square" lIns="0" tIns="0" rIns="0" bIns="0" rtlCol="0" anchor="ctr"/>
-          <a:lstStyle/>
-          <a:p>
-            <a:pPr marL="0" indent="0" algn="ctr">
-              <a:lnSpc>
-                <a:spcPct val="115000"/>
-              </a:lnSpc>
-              <a:buNone/>
-            </a:pPr>
-            <a:r>
-              <a:rPr lang="en-US" sz="1100" b="1" dirty="0">
-                <a:solidFill>
-                  <a:srgbClr val="1E2761"/>
-                </a:solidFill>
-                <a:latin typeface="Calibri" pitchFamily="34" charset="0"/>
-                <a:ea typeface="Calibri" pitchFamily="34" charset="-122"/>
-                <a:cs typeface="Calibri" pitchFamily="34" charset="-120"/>
-              </a:rPr>
-              <a:t>Build Report</a:t>
-            </a:r>
-            <a:endParaRPr lang="en-US" sz="1100" dirty="0"/>
-          </a:p>
-          <a:p>
-            <a:pPr marL="0" indent="0" algn="ctr">
-              <a:lnSpc>
-                <a:spcPct val="115000"/>
-              </a:lnSpc>
-              <a:buNone/>
-            </a:pPr>
-            <a:r>
-              <a:rPr lang="en-US" sz="1100" b="1" dirty="0">
-                <a:solidFill>
-                  <a:srgbClr val="1E2761"/>
-                </a:solidFill>
-                <a:latin typeface="Calibri" pitchFamily="34" charset="0"/>
-                <a:ea typeface="Calibri" pitchFamily="34" charset="-122"/>
-                <a:cs typeface="Calibri" pitchFamily="34" charset="-120"/>
-              </a:rPr>
-              <a:t>+ History</a:t>
-            </a:r>
-            <a:endParaRPr lang="en-US" sz="1100" dirty="0"/>
-          </a:p>
-        </p:txBody>
-      </p:sp>
-      <p:sp>
-        <p:nvSpPr>
-          <p:cNvPr id="18" name="Text 16"/>
-          <p:cNvSpPr/>
-          <p:nvPr/>
-        </p:nvSpPr>
-        <p:spPr>
-          <a:xfrm>
-            <a:off x="9744212" y="1764792"/>
-            <a:ext cx="225491" cy="1143000"/>
-          </a:xfrm>
-          <a:prstGeom prst="rect">
-            <a:avLst/>
-          </a:prstGeom>
-          <a:noFill/>
-          <a:ln/>
-        </p:spPr>
-        <p:txBody>
-          <a:bodyPr wrap="square" lIns="0" tIns="0" rIns="0" bIns="0" rtlCol="0" anchor="ctr"/>
-          <a:lstStyle/>
-          <a:p>
-            <a:pPr marL="0" indent="0" algn="ctr">
-              <a:buNone/>
-            </a:pPr>
-            <a:r>
-              <a:rPr lang="en-US" sz="1800" b="1" dirty="0">
-                <a:solidFill>
-                  <a:srgbClr val="5A6B87"/>
-                </a:solidFill>
-                <a:latin typeface="Arial" pitchFamily="34" charset="0"/>
-                <a:ea typeface="Arial" pitchFamily="34" charset="-122"/>
-                <a:cs typeface="Arial" pitchFamily="34" charset="-120"/>
-              </a:rPr>
-              <a:t>→</a:t>
-            </a:r>
-            <a:endParaRPr lang="en-US" sz="1800" dirty="0"/>
-          </a:p>
-        </p:txBody>
-      </p:sp>
-      <p:sp>
-        <p:nvSpPr>
-          <p:cNvPr id="19" name="Shape 17"/>
-          <p:cNvSpPr/>
-          <p:nvPr/>
-        </p:nvSpPr>
-        <p:spPr>
-          <a:xfrm>
-            <a:off x="9951415" y="1783080"/>
-            <a:ext cx="1691640" cy="1143000"/>
-          </a:xfrm>
-          <a:prstGeom prst="roundRect">
-            <a:avLst>
-              <a:gd name="adj" fmla="val 8000"/>
-            </a:avLst>
-          </a:prstGeom>
-          <a:solidFill>
-            <a:srgbClr val="F4F7FC"/>
-          </a:solidFill>
-          <a:ln w="19050">
-            <a:solidFill>
-              <a:srgbClr val="2FA36B"/>
-            </a:solidFill>
-            <a:prstDash val="solid"/>
-          </a:ln>
-        </p:spPr>
-        <p:txBody>
-          <a:bodyPr/>
-          <a:lstStyle/>
-          <a:p>
-            <a:endParaRPr lang="en-IN"/>
-          </a:p>
-        </p:txBody>
-      </p:sp>
-      <p:sp>
-        <p:nvSpPr>
-          <p:cNvPr id="20" name="Text 18"/>
-          <p:cNvSpPr/>
-          <p:nvPr/>
-        </p:nvSpPr>
-        <p:spPr>
-          <a:xfrm>
-            <a:off x="9951415" y="1783080"/>
-            <a:ext cx="1691640" cy="1143000"/>
-          </a:xfrm>
-          <a:prstGeom prst="rect">
-            <a:avLst/>
-          </a:prstGeom>
-          <a:noFill/>
-          <a:ln/>
-        </p:spPr>
-        <p:txBody>
-          <a:bodyPr wrap="square" lIns="0" tIns="0" rIns="0" bIns="0" rtlCol="0" anchor="ctr"/>
-          <a:lstStyle/>
-          <a:p>
-            <a:pPr marL="0" indent="0" algn="ctr">
-              <a:lnSpc>
-                <a:spcPct val="115000"/>
-              </a:lnSpc>
-              <a:buNone/>
-            </a:pPr>
-            <a:r>
-              <a:rPr lang="en-US" sz="1100" b="1" dirty="0">
-                <a:solidFill>
-                  <a:srgbClr val="1E2761"/>
-                </a:solidFill>
-                <a:latin typeface="Calibri" pitchFamily="34" charset="0"/>
-                <a:ea typeface="Calibri" pitchFamily="34" charset="-122"/>
-                <a:cs typeface="Calibri" pitchFamily="34" charset="-120"/>
-              </a:rPr>
-              <a:t>Publish to</a:t>
-            </a:r>
-            <a:endParaRPr lang="en-US" sz="1100" dirty="0"/>
-          </a:p>
-          <a:p>
-            <a:pPr marL="0" indent="0" algn="ctr">
-              <a:lnSpc>
-                <a:spcPct val="115000"/>
-              </a:lnSpc>
-              <a:buNone/>
-            </a:pPr>
-            <a:r>
-              <a:rPr lang="en-US" sz="1100" b="1" dirty="0">
-                <a:solidFill>
-                  <a:srgbClr val="1E2761"/>
-                </a:solidFill>
-                <a:latin typeface="Calibri" pitchFamily="34" charset="0"/>
-                <a:ea typeface="Calibri" pitchFamily="34" charset="-122"/>
-                <a:cs typeface="Calibri" pitchFamily="34" charset="-120"/>
-              </a:rPr>
-              <a:t>GitHub Pages</a:t>
-            </a:r>
-            <a:endParaRPr lang="en-US" sz="1100" dirty="0"/>
-          </a:p>
-        </p:txBody>
-      </p:sp>
-      <p:sp>
-        <p:nvSpPr>
-          <p:cNvPr id="21" name="Shape 19"/>
-          <p:cNvSpPr/>
-          <p:nvPr/>
-        </p:nvSpPr>
-        <p:spPr>
-          <a:xfrm>
-            <a:off x="548640" y="3291840"/>
-            <a:ext cx="3566160" cy="2148840"/>
-          </a:xfrm>
-          <a:prstGeom prst="roundRect">
-            <a:avLst>
-              <a:gd name="adj" fmla="val 4255"/>
-            </a:avLst>
-          </a:prstGeom>
-          <a:solidFill>
-            <a:srgbClr val="F4F7FC"/>
-          </a:solidFill>
-          <a:ln/>
-        </p:spPr>
-        <p:txBody>
-          <a:bodyPr/>
-          <a:lstStyle/>
-          <a:p>
-            <a:endParaRPr lang="en-IN"/>
-          </a:p>
-        </p:txBody>
-      </p:sp>
-      <p:sp>
-        <p:nvSpPr>
-          <p:cNvPr id="22" name="Text 20"/>
-          <p:cNvSpPr/>
-          <p:nvPr/>
-        </p:nvSpPr>
-        <p:spPr>
-          <a:xfrm>
-            <a:off x="777240" y="3493008"/>
-            <a:ext cx="3108960" cy="365760"/>
-          </a:xfrm>
-          <a:prstGeom prst="rect">
-            <a:avLst/>
-          </a:prstGeom>
-          <a:noFill/>
-          <a:ln/>
-        </p:spPr>
-        <p:txBody>
-          <a:bodyPr wrap="square" lIns="0" tIns="0" rIns="0" bIns="0" rtlCol="0" anchor="ctr"/>
-          <a:lstStyle/>
-          <a:p>
-            <a:pPr marL="0" indent="0">
-              <a:buNone/>
-            </a:pPr>
-            <a:r>
-              <a:rPr lang="en-US" sz="1350" b="1" dirty="0">
-                <a:solidFill>
-                  <a:srgbClr val="1E2761"/>
-                </a:solidFill>
-                <a:latin typeface="Calibri" pitchFamily="34" charset="0"/>
-                <a:ea typeface="Calibri" pitchFamily="34" charset="-122"/>
-                <a:cs typeface="Calibri" pitchFamily="34" charset="-120"/>
-              </a:rPr>
-              <a:t>Isolation matters</a:t>
-            </a:r>
-            <a:endParaRPr lang="en-US" sz="1350" dirty="0"/>
-          </a:p>
-        </p:txBody>
-      </p:sp>
-      <p:sp>
-        <p:nvSpPr>
-          <p:cNvPr id="23" name="Text 21"/>
-          <p:cNvSpPr/>
-          <p:nvPr/>
-        </p:nvSpPr>
-        <p:spPr>
-          <a:xfrm>
-            <a:off x="777240" y="3886200"/>
-            <a:ext cx="3108960" cy="1325880"/>
-          </a:xfrm>
-          <a:prstGeom prst="rect">
-            <a:avLst/>
-          </a:prstGeom>
-          <a:noFill/>
-          <a:ln/>
-        </p:spPr>
-        <p:txBody>
-          <a:bodyPr wrap="square" lIns="0" tIns="0" rIns="0" bIns="0" rtlCol="0" anchor="ctr"/>
-          <a:lstStyle/>
-          <a:p>
-            <a:pPr marL="0" indent="0">
-              <a:lnSpc>
-                <a:spcPct val="125000"/>
-              </a:lnSpc>
-              <a:buNone/>
-            </a:pPr>
-            <a:r>
-              <a:rPr lang="en-US" sz="1100" dirty="0">
-                <a:solidFill>
-                  <a:srgbClr val="5A6B87"/>
-                </a:solidFill>
-                <a:latin typeface="Calibri" pitchFamily="34" charset="0"/>
-                <a:ea typeface="Calibri" pitchFamily="34" charset="-122"/>
-                <a:cs typeface="Calibri" pitchFamily="34" charset="-120"/>
-              </a:rPr>
-              <a:t>maxParallelForks = 1 is set globally. With a shared MySQL instance, parallel forks caused real race-condition test failures — fixed once, applies to every future task.</a:t>
-            </a:r>
-            <a:endParaRPr lang="en-US" sz="1100" dirty="0"/>
-          </a:p>
-        </p:txBody>
-      </p:sp>
-      <p:sp>
-        <p:nvSpPr>
-          <p:cNvPr id="24" name="Shape 22"/>
-          <p:cNvSpPr/>
-          <p:nvPr/>
-        </p:nvSpPr>
-        <p:spPr>
-          <a:xfrm>
-            <a:off x="4370832" y="3291840"/>
-            <a:ext cx="3566160" cy="2148840"/>
-          </a:xfrm>
-          <a:prstGeom prst="roundRect">
-            <a:avLst>
-              <a:gd name="adj" fmla="val 4255"/>
-            </a:avLst>
-          </a:prstGeom>
-          <a:solidFill>
-            <a:srgbClr val="F4F7FC"/>
-          </a:solidFill>
-          <a:ln/>
-        </p:spPr>
-        <p:txBody>
-          <a:bodyPr/>
-          <a:lstStyle/>
-          <a:p>
-            <a:endParaRPr lang="en-IN"/>
-          </a:p>
-        </p:txBody>
-      </p:sp>
-      <p:sp>
-        <p:nvSpPr>
-          <p:cNvPr id="25" name="Text 23"/>
-          <p:cNvSpPr/>
-          <p:nvPr/>
-        </p:nvSpPr>
-        <p:spPr>
-          <a:xfrm>
-            <a:off x="4599432" y="3493008"/>
-            <a:ext cx="3108960" cy="365760"/>
-          </a:xfrm>
-          <a:prstGeom prst="rect">
-            <a:avLst/>
-          </a:prstGeom>
-          <a:noFill/>
-          <a:ln/>
-        </p:spPr>
-        <p:txBody>
-          <a:bodyPr wrap="square" lIns="0" tIns="0" rIns="0" bIns="0" rtlCol="0" anchor="ctr"/>
-          <a:lstStyle/>
-          <a:p>
-            <a:pPr marL="0" indent="0">
-              <a:buNone/>
-            </a:pPr>
-            <a:r>
-              <a:rPr lang="en-US" sz="1350" b="1" dirty="0">
-                <a:solidFill>
-                  <a:srgbClr val="1E2761"/>
-                </a:solidFill>
-                <a:latin typeface="Calibri" pitchFamily="34" charset="0"/>
-                <a:ea typeface="Calibri" pitchFamily="34" charset="-122"/>
-                <a:cs typeface="Calibri" pitchFamily="34" charset="-120"/>
-              </a:rPr>
-              <a:t>History that persists</a:t>
-            </a:r>
-            <a:endParaRPr lang="en-US" sz="1350" dirty="0"/>
-          </a:p>
-        </p:txBody>
-      </p:sp>
-      <p:sp>
-        <p:nvSpPr>
-          <p:cNvPr id="26" name="Text 24"/>
-          <p:cNvSpPr/>
-          <p:nvPr/>
-        </p:nvSpPr>
-        <p:spPr>
-          <a:xfrm>
-            <a:off x="4599432" y="3886200"/>
-            <a:ext cx="3108960" cy="1325880"/>
-          </a:xfrm>
-          <a:prstGeom prst="rect">
-            <a:avLst/>
-          </a:prstGeom>
-          <a:noFill/>
-          <a:ln/>
-        </p:spPr>
-        <p:txBody>
-          <a:bodyPr wrap="square" lIns="0" tIns="0" rIns="0" bIns="0" rtlCol="0" anchor="ctr"/>
-          <a:lstStyle/>
-          <a:p>
-            <a:pPr marL="0" indent="0">
-              <a:lnSpc>
-                <a:spcPct val="125000"/>
-              </a:lnSpc>
-              <a:buNone/>
-            </a:pPr>
-            <a:r>
-              <a:rPr lang="en-US" sz="1100" dirty="0">
-                <a:solidFill>
-                  <a:srgbClr val="5A6B87"/>
-                </a:solidFill>
-                <a:latin typeface="Calibri" pitchFamily="34" charset="0"/>
-                <a:ea typeface="Calibri" pitchFamily="34" charset="-122"/>
-                <a:cs typeface="Calibri" pitchFamily="34" charset="-120"/>
-              </a:rPr>
-              <a:t>gh-pages is checked out before the report builds, and simple-elf/allure-report-action merges old + new results so the Trend graph spans runs, not just one.</a:t>
-            </a:r>
-            <a:endParaRPr lang="en-US" sz="1100" dirty="0"/>
-          </a:p>
-        </p:txBody>
-      </p:sp>
-      <p:sp>
-        <p:nvSpPr>
-          <p:cNvPr id="27" name="Shape 25"/>
-          <p:cNvSpPr/>
-          <p:nvPr/>
-        </p:nvSpPr>
-        <p:spPr>
-          <a:xfrm>
-            <a:off x="8193024" y="3291840"/>
-            <a:ext cx="3566160" cy="2148840"/>
-          </a:xfrm>
-          <a:prstGeom prst="roundRect">
-            <a:avLst>
-              <a:gd name="adj" fmla="val 4255"/>
-            </a:avLst>
-          </a:prstGeom>
-          <a:solidFill>
-            <a:srgbClr val="F4F7FC"/>
-          </a:solidFill>
-          <a:ln/>
-        </p:spPr>
-        <p:txBody>
-          <a:bodyPr/>
-          <a:lstStyle/>
-          <a:p>
-            <a:endParaRPr lang="en-IN"/>
-          </a:p>
-        </p:txBody>
-      </p:sp>
-      <p:sp>
-        <p:nvSpPr>
-          <p:cNvPr id="28" name="Text 26"/>
-          <p:cNvSpPr/>
-          <p:nvPr/>
-        </p:nvSpPr>
-        <p:spPr>
-          <a:xfrm>
-            <a:off x="8421624" y="3493008"/>
-            <a:ext cx="3108960" cy="365760"/>
-          </a:xfrm>
-          <a:prstGeom prst="rect">
-            <a:avLst/>
-          </a:prstGeom>
-          <a:noFill/>
-          <a:ln/>
-        </p:spPr>
-        <p:txBody>
-          <a:bodyPr wrap="square" lIns="0" tIns="0" rIns="0" bIns="0" rtlCol="0" anchor="ctr"/>
-          <a:lstStyle/>
-          <a:p>
-            <a:pPr marL="0" indent="0">
-              <a:buNone/>
-            </a:pPr>
-            <a:r>
-              <a:rPr lang="en-US" sz="1350" b="1" dirty="0">
-                <a:solidFill>
-                  <a:srgbClr val="1E2761"/>
-                </a:solidFill>
-                <a:latin typeface="Calibri" pitchFamily="34" charset="0"/>
-                <a:ea typeface="Calibri" pitchFamily="34" charset="-122"/>
-                <a:cs typeface="Calibri" pitchFamily="34" charset="-120"/>
-              </a:rPr>
-              <a:t>A gotcha we hit</a:t>
-            </a:r>
-            <a:endParaRPr lang="en-US" sz="1350" dirty="0"/>
-          </a:p>
-        </p:txBody>
-      </p:sp>
-      <p:sp>
-        <p:nvSpPr>
-          <p:cNvPr id="29" name="Text 27"/>
-          <p:cNvSpPr/>
-          <p:nvPr/>
-        </p:nvSpPr>
-        <p:spPr>
-          <a:xfrm>
-            <a:off x="8421624" y="3886200"/>
-            <a:ext cx="3108960" cy="1325880"/>
-          </a:xfrm>
-          <a:prstGeom prst="rect">
-            <a:avLst/>
-          </a:prstGeom>
-          <a:noFill/>
-          <a:ln/>
-        </p:spPr>
-        <p:txBody>
-          <a:bodyPr wrap="square" lIns="0" tIns="0" rIns="0" bIns="0" rtlCol="0" anchor="ctr"/>
-          <a:lstStyle/>
-          <a:p>
-            <a:pPr marL="0" indent="0">
-              <a:lnSpc>
-                <a:spcPct val="125000"/>
-              </a:lnSpc>
-              <a:buNone/>
-            </a:pPr>
-            <a:r>
-              <a:rPr lang="en-US" sz="1100" dirty="0">
-                <a:solidFill>
-                  <a:srgbClr val="5A6B87"/>
-                </a:solidFill>
-                <a:latin typeface="Calibri" pitchFamily="34" charset="0"/>
-                <a:ea typeface="Calibri" pitchFamily="34" charset="-122"/>
-                <a:cs typeface="Calibri" pitchFamily="34" charset="-120"/>
-              </a:rPr>
-              <a:t>simple-elf's report action leaves a root-owned .git folder inside allure-history; peaceiris/actions-gh-pages can't clean it without sudo rm -rf — now handled explicitly.</a:t>
-            </a:r>
-            <a:endParaRPr lang="en-US" sz="1100" dirty="0"/>
-          </a:p>
-        </p:txBody>
-      </p:sp>
-      <p:sp>
-        <p:nvSpPr>
-          <p:cNvPr id="30" name="Text 28"/>
-          <p:cNvSpPr/>
-          <p:nvPr/>
-        </p:nvSpPr>
-        <p:spPr>
-          <a:xfrm>
-            <a:off x="11475720" y="6446520"/>
-            <a:ext cx="548640" cy="320040"/>
-          </a:xfrm>
-          <a:prstGeom prst="rect">
-            <a:avLst/>
-          </a:prstGeom>
-          <a:noFill/>
-          <a:ln/>
-        </p:spPr>
-        <p:txBody>
-          <a:bodyPr wrap="square" rtlCol="0" anchor="ctr"/>
-          <a:lstStyle/>
-          <a:p>
-            <a:pPr marL="0" indent="0" algn="r">
-              <a:buNone/>
-            </a:pPr>
-            <a:r>
-              <a:rPr lang="en-US" sz="1100" dirty="0">
-                <a:solidFill>
-                  <a:srgbClr val="5A6B87"/>
-                </a:solidFill>
-                <a:latin typeface="Calibri" pitchFamily="34" charset="0"/>
-                <a:ea typeface="Calibri" pitchFamily="34" charset="-122"/>
-                <a:cs typeface="Calibri" pitchFamily="34" charset="-120"/>
-              </a:rPr>
-              <a:t>08</a:t>
-            </a:r>
-            <a:endParaRPr lang="en-US" sz="1100" dirty="0"/>
-          </a:p>
-        </p:txBody>
-      </p:sp>
-    </p:spTree>
-  </p:cSld>
-  <p:clrMapOvr>
-    <a:masterClrMapping/>
-  </p:clrMapOvr>
-</p:sld>
-</file>
-
-<file path=ppt/slides/slide11.xml><?xml version="1.0" encoding="utf-8"?>
 <p:sld xmlns:a="http://schemas.openxmlformats.org/drawingml/2006/main" xmlns:r="http://schemas.openxmlformats.org/officeDocument/2006/relationships" xmlns:p="http://schemas.openxmlformats.org/presentationml/2006/main">
   <p:cSld name="Slide 9">
     <p:bg>
@@ -7052,7 +5671,7 @@
 </p:sld>
 </file>
 
-<file path=ppt/slides/slide12.xml><?xml version="1.0" encoding="utf-8"?>
+<file path=ppt/slides/slide11.xml><?xml version="1.0" encoding="utf-8"?>
 <p:sld xmlns:a="http://schemas.openxmlformats.org/drawingml/2006/main" xmlns:r="http://schemas.openxmlformats.org/officeDocument/2006/relationships" xmlns:p="http://schemas.openxmlformats.org/presentationml/2006/main">
   <p:cSld name="Slide 10">
     <p:bg>
@@ -8327,1796 +6946,6 @@
 
 <file path=ppt/slides/slide4.xml><?xml version="1.0" encoding="utf-8"?>
 <p:sld xmlns:a="http://schemas.openxmlformats.org/drawingml/2006/main" xmlns:r="http://schemas.openxmlformats.org/officeDocument/2006/relationships" xmlns:p="http://schemas.openxmlformats.org/presentationml/2006/main">
-  <p:cSld name="Slide 3">
-    <p:bg>
-      <p:bgPr>
-        <a:solidFill>
-          <a:srgbClr val="FFFFFF"/>
-        </a:solidFill>
-        <a:effectLst/>
-      </p:bgPr>
-    </p:bg>
-    <p:spTree>
-      <p:nvGrpSpPr>
-        <p:cNvPr id="1" name=""/>
-        <p:cNvGrpSpPr/>
-        <p:nvPr/>
-      </p:nvGrpSpPr>
-      <p:grpSpPr>
-        <a:xfrm>
-          <a:off x="0" y="0"/>
-          <a:ext cx="0" cy="0"/>
-          <a:chOff x="0" y="0"/>
-          <a:chExt cx="0" cy="0"/>
-        </a:xfrm>
-      </p:grpSpPr>
-      <p:sp>
-        <p:nvSpPr>
-          <p:cNvPr id="2" name="Text 0"/>
-          <p:cNvSpPr/>
-          <p:nvPr/>
-        </p:nvSpPr>
-        <p:spPr>
-          <a:xfrm>
-            <a:off x="548640" y="384048"/>
-            <a:ext cx="9144000" cy="320040"/>
-          </a:xfrm>
-          <a:prstGeom prst="rect">
-            <a:avLst/>
-          </a:prstGeom>
-          <a:noFill/>
-          <a:ln/>
-        </p:spPr>
-        <p:txBody>
-          <a:bodyPr wrap="square" rtlCol="0" anchor="ctr"/>
-          <a:lstStyle/>
-          <a:p>
-            <a:pPr marL="0" indent="0">
-              <a:buNone/>
-            </a:pPr>
-            <a:r>
-              <a:rPr lang="en-US" sz="1300" b="1" kern="0" spc="200" dirty="0">
-                <a:solidFill>
-                  <a:srgbClr val="1E2761"/>
-                </a:solidFill>
-                <a:latin typeface="Calibri" pitchFamily="34" charset="0"/>
-                <a:ea typeface="Calibri" pitchFamily="34" charset="-122"/>
-                <a:cs typeface="Calibri" pitchFamily="34" charset="-120"/>
-              </a:rPr>
-              <a:t>PROJECT STRUCTURE</a:t>
-            </a:r>
-            <a:endParaRPr lang="en-US" sz="1300" dirty="0"/>
-          </a:p>
-        </p:txBody>
-      </p:sp>
-      <p:sp>
-        <p:nvSpPr>
-          <p:cNvPr id="3" name="Text 1"/>
-          <p:cNvSpPr/>
-          <p:nvPr/>
-        </p:nvSpPr>
-        <p:spPr>
-          <a:xfrm>
-            <a:off x="548640" y="685800"/>
-            <a:ext cx="11064240" cy="777240"/>
-          </a:xfrm>
-          <a:prstGeom prst="rect">
-            <a:avLst/>
-          </a:prstGeom>
-          <a:noFill/>
-          <a:ln/>
-        </p:spPr>
-        <p:txBody>
-          <a:bodyPr wrap="square" rtlCol="0" anchor="ctr"/>
-          <a:lstStyle/>
-          <a:p>
-            <a:pPr marL="0" indent="0">
-              <a:buNone/>
-            </a:pPr>
-            <a:r>
-              <a:rPr lang="en-US" sz="3200" b="1" dirty="0">
-                <a:solidFill>
-                  <a:srgbClr val="1E2761"/>
-                </a:solidFill>
-                <a:latin typeface="Cambria" pitchFamily="34" charset="0"/>
-                <a:ea typeface="Cambria" pitchFamily="34" charset="-122"/>
-                <a:cs typeface="Cambria" pitchFamily="34" charset="-120"/>
-              </a:rPr>
-              <a:t>Layered Package Architecture</a:t>
-            </a:r>
-            <a:endParaRPr lang="en-US" sz="3200" dirty="0"/>
-          </a:p>
-        </p:txBody>
-      </p:sp>
-      <p:sp>
-        <p:nvSpPr>
-          <p:cNvPr id="4" name="Shape 2"/>
-          <p:cNvSpPr/>
-          <p:nvPr/>
-        </p:nvSpPr>
-        <p:spPr>
-          <a:xfrm>
-            <a:off x="548640" y="1691640"/>
-            <a:ext cx="2103120" cy="1691640"/>
-          </a:xfrm>
-          <a:prstGeom prst="roundRect">
-            <a:avLst>
-              <a:gd name="adj" fmla="val 4324"/>
-            </a:avLst>
-          </a:prstGeom>
-          <a:solidFill>
-            <a:srgbClr val="F4F7FC"/>
-          </a:solidFill>
-          <a:ln/>
-          <a:effectLst>
-            <a:outerShdw blurRad="76200" dist="25400" dir="5400000" algn="bl" rotWithShape="0">
-              <a:srgbClr val="1E2761">
-                <a:alpha val="12000"/>
-              </a:srgbClr>
-            </a:outerShdw>
-          </a:effectLst>
-        </p:spPr>
-        <p:txBody>
-          <a:bodyPr/>
-          <a:lstStyle/>
-          <a:p>
-            <a:endParaRPr lang="en-IN"/>
-          </a:p>
-        </p:txBody>
-      </p:sp>
-      <p:sp>
-        <p:nvSpPr>
-          <p:cNvPr id="5" name="Shape 3"/>
-          <p:cNvSpPr/>
-          <p:nvPr/>
-        </p:nvSpPr>
-        <p:spPr>
-          <a:xfrm>
-            <a:off x="694944" y="1837944"/>
-            <a:ext cx="310896" cy="91440"/>
-          </a:xfrm>
-          <a:prstGeom prst="roundRect">
-            <a:avLst>
-              <a:gd name="adj" fmla="val 50000"/>
-            </a:avLst>
-          </a:prstGeom>
-          <a:solidFill>
-            <a:srgbClr val="1E2761"/>
-          </a:solidFill>
-          <a:ln/>
-        </p:spPr>
-        <p:txBody>
-          <a:bodyPr/>
-          <a:lstStyle/>
-          <a:p>
-            <a:endParaRPr lang="en-IN"/>
-          </a:p>
-        </p:txBody>
-      </p:sp>
-      <p:sp>
-        <p:nvSpPr>
-          <p:cNvPr id="6" name="Text 4"/>
-          <p:cNvSpPr/>
-          <p:nvPr/>
-        </p:nvSpPr>
-        <p:spPr>
-          <a:xfrm>
-            <a:off x="676656" y="2002536"/>
-            <a:ext cx="1847088" cy="384048"/>
-          </a:xfrm>
-          <a:prstGeom prst="rect">
-            <a:avLst/>
-          </a:prstGeom>
-          <a:noFill/>
-          <a:ln/>
-        </p:spPr>
-        <p:txBody>
-          <a:bodyPr wrap="square" lIns="0" tIns="0" rIns="0" bIns="0" rtlCol="0" anchor="ctr"/>
-          <a:lstStyle/>
-          <a:p>
-            <a:pPr marL="0" indent="0">
-              <a:buNone/>
-            </a:pPr>
-            <a:r>
-              <a:rPr lang="en-US" sz="1350" b="1" dirty="0">
-                <a:solidFill>
-                  <a:srgbClr val="1E2761"/>
-                </a:solidFill>
-                <a:latin typeface="Calibri" pitchFamily="34" charset="0"/>
-                <a:ea typeface="Calibri" pitchFamily="34" charset="-122"/>
-                <a:cs typeface="Calibri" pitchFamily="34" charset="-120"/>
-              </a:rPr>
-              <a:t>api.client</a:t>
-            </a:r>
-            <a:endParaRPr lang="en-US" sz="1350" dirty="0"/>
-          </a:p>
-        </p:txBody>
-      </p:sp>
-      <p:sp>
-        <p:nvSpPr>
-          <p:cNvPr id="7" name="Text 5"/>
-          <p:cNvSpPr/>
-          <p:nvPr/>
-        </p:nvSpPr>
-        <p:spPr>
-          <a:xfrm>
-            <a:off x="676656" y="2404872"/>
-            <a:ext cx="1847088" cy="868680"/>
-          </a:xfrm>
-          <a:prstGeom prst="rect">
-            <a:avLst/>
-          </a:prstGeom>
-          <a:noFill/>
-          <a:ln/>
-        </p:spPr>
-        <p:txBody>
-          <a:bodyPr wrap="square" lIns="0" tIns="0" rIns="0" bIns="0" rtlCol="0" anchor="ctr"/>
-          <a:lstStyle/>
-          <a:p>
-            <a:pPr marL="0" indent="0">
-              <a:lnSpc>
-                <a:spcPct val="120000"/>
-              </a:lnSpc>
-              <a:buNone/>
-            </a:pPr>
-            <a:r>
-              <a:rPr lang="en-US" sz="950" dirty="0">
-                <a:solidFill>
-                  <a:srgbClr val="5A6B87"/>
-                </a:solidFill>
-                <a:latin typeface="Calibri" pitchFamily="34" charset="0"/>
-                <a:ea typeface="Calibri" pitchFamily="34" charset="-122"/>
-                <a:cs typeface="Calibri" pitchFamily="34" charset="-120"/>
-              </a:rPr>
-              <a:t>AuthClient · CartClient</a:t>
-            </a:r>
-            <a:endParaRPr lang="en-US" sz="950" dirty="0"/>
-          </a:p>
-          <a:p>
-            <a:pPr marL="0" indent="0">
-              <a:lnSpc>
-                <a:spcPct val="120000"/>
-              </a:lnSpc>
-              <a:buNone/>
-            </a:pPr>
-            <a:r>
-              <a:rPr lang="en-US" sz="950" dirty="0">
-                <a:solidFill>
-                  <a:srgbClr val="5A6B87"/>
-                </a:solidFill>
-                <a:latin typeface="Calibri" pitchFamily="34" charset="0"/>
-                <a:ea typeface="Calibri" pitchFamily="34" charset="-122"/>
-                <a:cs typeface="Calibri" pitchFamily="34" charset="-120"/>
-              </a:rPr>
-              <a:t>OrderClient · ProductClient</a:t>
-            </a:r>
-            <a:endParaRPr lang="en-US" sz="950" dirty="0"/>
-          </a:p>
-        </p:txBody>
-      </p:sp>
-      <p:sp>
-        <p:nvSpPr>
-          <p:cNvPr id="8" name="Shape 6"/>
-          <p:cNvSpPr/>
-          <p:nvPr/>
-        </p:nvSpPr>
-        <p:spPr>
-          <a:xfrm>
-            <a:off x="2816352" y="1691640"/>
-            <a:ext cx="2103120" cy="1691640"/>
-          </a:xfrm>
-          <a:prstGeom prst="roundRect">
-            <a:avLst>
-              <a:gd name="adj" fmla="val 4324"/>
-            </a:avLst>
-          </a:prstGeom>
-          <a:solidFill>
-            <a:srgbClr val="F4F7FC"/>
-          </a:solidFill>
-          <a:ln/>
-          <a:effectLst>
-            <a:outerShdw blurRad="76200" dist="25400" dir="5400000" algn="bl" rotWithShape="0">
-              <a:srgbClr val="1E2761">
-                <a:alpha val="12000"/>
-              </a:srgbClr>
-            </a:outerShdw>
-          </a:effectLst>
-        </p:spPr>
-        <p:txBody>
-          <a:bodyPr/>
-          <a:lstStyle/>
-          <a:p>
-            <a:endParaRPr lang="en-IN"/>
-          </a:p>
-        </p:txBody>
-      </p:sp>
-      <p:sp>
-        <p:nvSpPr>
-          <p:cNvPr id="9" name="Shape 7"/>
-          <p:cNvSpPr/>
-          <p:nvPr/>
-        </p:nvSpPr>
-        <p:spPr>
-          <a:xfrm>
-            <a:off x="2962656" y="1837944"/>
-            <a:ext cx="310896" cy="91440"/>
-          </a:xfrm>
-          <a:prstGeom prst="roundRect">
-            <a:avLst>
-              <a:gd name="adj" fmla="val 50000"/>
-            </a:avLst>
-          </a:prstGeom>
-          <a:solidFill>
-            <a:srgbClr val="1E2761"/>
-          </a:solidFill>
-          <a:ln/>
-        </p:spPr>
-        <p:txBody>
-          <a:bodyPr/>
-          <a:lstStyle/>
-          <a:p>
-            <a:endParaRPr lang="en-IN"/>
-          </a:p>
-        </p:txBody>
-      </p:sp>
-      <p:sp>
-        <p:nvSpPr>
-          <p:cNvPr id="10" name="Text 8"/>
-          <p:cNvSpPr/>
-          <p:nvPr/>
-        </p:nvSpPr>
-        <p:spPr>
-          <a:xfrm>
-            <a:off x="2944368" y="2002536"/>
-            <a:ext cx="1847088" cy="384048"/>
-          </a:xfrm>
-          <a:prstGeom prst="rect">
-            <a:avLst/>
-          </a:prstGeom>
-          <a:noFill/>
-          <a:ln/>
-        </p:spPr>
-        <p:txBody>
-          <a:bodyPr wrap="square" lIns="0" tIns="0" rIns="0" bIns="0" rtlCol="0" anchor="ctr"/>
-          <a:lstStyle/>
-          <a:p>
-            <a:pPr marL="0" indent="0">
-              <a:buNone/>
-            </a:pPr>
-            <a:r>
-              <a:rPr lang="en-US" sz="1350" b="1" dirty="0">
-                <a:solidFill>
-                  <a:srgbClr val="1E2761"/>
-                </a:solidFill>
-                <a:latin typeface="Calibri" pitchFamily="34" charset="0"/>
-                <a:ea typeface="Calibri" pitchFamily="34" charset="-122"/>
-                <a:cs typeface="Calibri" pitchFamily="34" charset="-120"/>
-              </a:rPr>
-              <a:t>config</a:t>
-            </a:r>
-            <a:endParaRPr lang="en-US" sz="1350" dirty="0"/>
-          </a:p>
-        </p:txBody>
-      </p:sp>
-      <p:sp>
-        <p:nvSpPr>
-          <p:cNvPr id="11" name="Text 9"/>
-          <p:cNvSpPr/>
-          <p:nvPr/>
-        </p:nvSpPr>
-        <p:spPr>
-          <a:xfrm>
-            <a:off x="2944368" y="2404872"/>
-            <a:ext cx="1847088" cy="868680"/>
-          </a:xfrm>
-          <a:prstGeom prst="rect">
-            <a:avLst/>
-          </a:prstGeom>
-          <a:noFill/>
-          <a:ln/>
-        </p:spPr>
-        <p:txBody>
-          <a:bodyPr wrap="square" lIns="0" tIns="0" rIns="0" bIns="0" rtlCol="0" anchor="ctr"/>
-          <a:lstStyle/>
-          <a:p>
-            <a:pPr marL="0" indent="0">
-              <a:lnSpc>
-                <a:spcPct val="120000"/>
-              </a:lnSpc>
-              <a:buNone/>
-            </a:pPr>
-            <a:r>
-              <a:rPr lang="en-US" sz="950" dirty="0">
-                <a:solidFill>
-                  <a:srgbClr val="5A6B87"/>
-                </a:solidFill>
-                <a:latin typeface="Calibri" pitchFamily="34" charset="0"/>
-                <a:ea typeface="Calibri" pitchFamily="34" charset="-122"/>
-                <a:cs typeface="Calibri" pitchFamily="34" charset="-120"/>
-              </a:rPr>
-              <a:t>DatabaseConfig</a:t>
-            </a:r>
-            <a:endParaRPr lang="en-US" sz="950" dirty="0"/>
-          </a:p>
-          <a:p>
-            <a:pPr marL="0" indent="0">
-              <a:lnSpc>
-                <a:spcPct val="120000"/>
-              </a:lnSpc>
-              <a:buNone/>
-            </a:pPr>
-            <a:r>
-              <a:rPr lang="en-US" sz="950" dirty="0">
-                <a:solidFill>
-                  <a:srgbClr val="5A6B87"/>
-                </a:solidFill>
-                <a:latin typeface="Calibri" pitchFamily="34" charset="0"/>
-                <a:ea typeface="Calibri" pitchFamily="34" charset="-122"/>
-                <a:cs typeface="Calibri" pitchFamily="34" charset="-120"/>
-              </a:rPr>
-              <a:t>SelenideConfig</a:t>
-            </a:r>
-            <a:endParaRPr lang="en-US" sz="950" dirty="0"/>
-          </a:p>
-        </p:txBody>
-      </p:sp>
-      <p:sp>
-        <p:nvSpPr>
-          <p:cNvPr id="12" name="Shape 10"/>
-          <p:cNvSpPr/>
-          <p:nvPr/>
-        </p:nvSpPr>
-        <p:spPr>
-          <a:xfrm>
-            <a:off x="5084064" y="1691640"/>
-            <a:ext cx="2103120" cy="1691640"/>
-          </a:xfrm>
-          <a:prstGeom prst="roundRect">
-            <a:avLst>
-              <a:gd name="adj" fmla="val 4324"/>
-            </a:avLst>
-          </a:prstGeom>
-          <a:solidFill>
-            <a:srgbClr val="F4F7FC"/>
-          </a:solidFill>
-          <a:ln/>
-          <a:effectLst>
-            <a:outerShdw blurRad="76200" dist="25400" dir="5400000" algn="bl" rotWithShape="0">
-              <a:srgbClr val="1E2761">
-                <a:alpha val="12000"/>
-              </a:srgbClr>
-            </a:outerShdw>
-          </a:effectLst>
-        </p:spPr>
-        <p:txBody>
-          <a:bodyPr/>
-          <a:lstStyle/>
-          <a:p>
-            <a:endParaRPr lang="en-IN"/>
-          </a:p>
-        </p:txBody>
-      </p:sp>
-      <p:sp>
-        <p:nvSpPr>
-          <p:cNvPr id="13" name="Shape 11"/>
-          <p:cNvSpPr/>
-          <p:nvPr/>
-        </p:nvSpPr>
-        <p:spPr>
-          <a:xfrm>
-            <a:off x="5230368" y="1837944"/>
-            <a:ext cx="310896" cy="91440"/>
-          </a:xfrm>
-          <a:prstGeom prst="roundRect">
-            <a:avLst>
-              <a:gd name="adj" fmla="val 50000"/>
-            </a:avLst>
-          </a:prstGeom>
-          <a:solidFill>
-            <a:srgbClr val="1E2761"/>
-          </a:solidFill>
-          <a:ln/>
-        </p:spPr>
-        <p:txBody>
-          <a:bodyPr/>
-          <a:lstStyle/>
-          <a:p>
-            <a:endParaRPr lang="en-IN"/>
-          </a:p>
-        </p:txBody>
-      </p:sp>
-      <p:sp>
-        <p:nvSpPr>
-          <p:cNvPr id="14" name="Text 12"/>
-          <p:cNvSpPr/>
-          <p:nvPr/>
-        </p:nvSpPr>
-        <p:spPr>
-          <a:xfrm>
-            <a:off x="5212080" y="2002536"/>
-            <a:ext cx="1847088" cy="384048"/>
-          </a:xfrm>
-          <a:prstGeom prst="rect">
-            <a:avLst/>
-          </a:prstGeom>
-          <a:noFill/>
-          <a:ln/>
-        </p:spPr>
-        <p:txBody>
-          <a:bodyPr wrap="square" lIns="0" tIns="0" rIns="0" bIns="0" rtlCol="0" anchor="ctr"/>
-          <a:lstStyle/>
-          <a:p>
-            <a:pPr marL="0" indent="0">
-              <a:buNone/>
-            </a:pPr>
-            <a:r>
-              <a:rPr lang="en-US" sz="1350" b="1" dirty="0">
-                <a:solidFill>
-                  <a:srgbClr val="1E2761"/>
-                </a:solidFill>
-                <a:latin typeface="Calibri" pitchFamily="34" charset="0"/>
-                <a:ea typeface="Calibri" pitchFamily="34" charset="-122"/>
-                <a:cs typeface="Calibri" pitchFamily="34" charset="-120"/>
-              </a:rPr>
-              <a:t>builder / factory</a:t>
-            </a:r>
-            <a:endParaRPr lang="en-US" sz="1350" dirty="0"/>
-          </a:p>
-        </p:txBody>
-      </p:sp>
-      <p:sp>
-        <p:nvSpPr>
-          <p:cNvPr id="15" name="Text 13"/>
-          <p:cNvSpPr/>
-          <p:nvPr/>
-        </p:nvSpPr>
-        <p:spPr>
-          <a:xfrm>
-            <a:off x="5212080" y="2404872"/>
-            <a:ext cx="1847088" cy="868680"/>
-          </a:xfrm>
-          <a:prstGeom prst="rect">
-            <a:avLst/>
-          </a:prstGeom>
-          <a:noFill/>
-          <a:ln/>
-        </p:spPr>
-        <p:txBody>
-          <a:bodyPr wrap="square" lIns="0" tIns="0" rIns="0" bIns="0" rtlCol="0" anchor="ctr"/>
-          <a:lstStyle/>
-          <a:p>
-            <a:pPr marL="0" indent="0">
-              <a:lnSpc>
-                <a:spcPct val="120000"/>
-              </a:lnSpc>
-              <a:buNone/>
-            </a:pPr>
-            <a:r>
-              <a:rPr lang="en-US" sz="950" dirty="0">
-                <a:solidFill>
-                  <a:srgbClr val="5A6B87"/>
-                </a:solidFill>
-                <a:latin typeface="Calibri" pitchFamily="34" charset="0"/>
-                <a:ea typeface="Calibri" pitchFamily="34" charset="-122"/>
-                <a:cs typeface="Calibri" pitchFamily="34" charset="-120"/>
-              </a:rPr>
-              <a:t>OrderBuilder</a:t>
-            </a:r>
-            <a:endParaRPr lang="en-US" sz="950" dirty="0"/>
-          </a:p>
-          <a:p>
-            <a:pPr marL="0" indent="0">
-              <a:lnSpc>
-                <a:spcPct val="120000"/>
-              </a:lnSpc>
-              <a:buNone/>
-            </a:pPr>
-            <a:r>
-              <a:rPr lang="en-US" sz="950" dirty="0">
-                <a:solidFill>
-                  <a:srgbClr val="5A6B87"/>
-                </a:solidFill>
-                <a:latin typeface="Calibri" pitchFamily="34" charset="0"/>
-                <a:ea typeface="Calibri" pitchFamily="34" charset="-122"/>
-                <a:cs typeface="Calibri" pitchFamily="34" charset="-120"/>
-              </a:rPr>
-              <a:t>OrderFactory</a:t>
-            </a:r>
-            <a:endParaRPr lang="en-US" sz="950" dirty="0"/>
-          </a:p>
-        </p:txBody>
-      </p:sp>
-      <p:sp>
-        <p:nvSpPr>
-          <p:cNvPr id="16" name="Shape 14"/>
-          <p:cNvSpPr/>
-          <p:nvPr/>
-        </p:nvSpPr>
-        <p:spPr>
-          <a:xfrm>
-            <a:off x="7351776" y="1691640"/>
-            <a:ext cx="2103120" cy="1691640"/>
-          </a:xfrm>
-          <a:prstGeom prst="roundRect">
-            <a:avLst>
-              <a:gd name="adj" fmla="val 4324"/>
-            </a:avLst>
-          </a:prstGeom>
-          <a:solidFill>
-            <a:srgbClr val="F4F7FC"/>
-          </a:solidFill>
-          <a:ln/>
-          <a:effectLst>
-            <a:outerShdw blurRad="76200" dist="25400" dir="5400000" algn="bl" rotWithShape="0">
-              <a:srgbClr val="1E2761">
-                <a:alpha val="12000"/>
-              </a:srgbClr>
-            </a:outerShdw>
-          </a:effectLst>
-        </p:spPr>
-        <p:txBody>
-          <a:bodyPr/>
-          <a:lstStyle/>
-          <a:p>
-            <a:endParaRPr lang="en-IN"/>
-          </a:p>
-        </p:txBody>
-      </p:sp>
-      <p:sp>
-        <p:nvSpPr>
-          <p:cNvPr id="17" name="Shape 15"/>
-          <p:cNvSpPr/>
-          <p:nvPr/>
-        </p:nvSpPr>
-        <p:spPr>
-          <a:xfrm>
-            <a:off x="7498080" y="1837944"/>
-            <a:ext cx="310896" cy="91440"/>
-          </a:xfrm>
-          <a:prstGeom prst="roundRect">
-            <a:avLst>
-              <a:gd name="adj" fmla="val 50000"/>
-            </a:avLst>
-          </a:prstGeom>
-          <a:solidFill>
-            <a:srgbClr val="1E2761"/>
-          </a:solidFill>
-          <a:ln/>
-        </p:spPr>
-        <p:txBody>
-          <a:bodyPr/>
-          <a:lstStyle/>
-          <a:p>
-            <a:endParaRPr lang="en-IN"/>
-          </a:p>
-        </p:txBody>
-      </p:sp>
-      <p:sp>
-        <p:nvSpPr>
-          <p:cNvPr id="18" name="Text 16"/>
-          <p:cNvSpPr/>
-          <p:nvPr/>
-        </p:nvSpPr>
-        <p:spPr>
-          <a:xfrm>
-            <a:off x="7479792" y="2002536"/>
-            <a:ext cx="1847088" cy="384048"/>
-          </a:xfrm>
-          <a:prstGeom prst="rect">
-            <a:avLst/>
-          </a:prstGeom>
-          <a:noFill/>
-          <a:ln/>
-        </p:spPr>
-        <p:txBody>
-          <a:bodyPr wrap="square" lIns="0" tIns="0" rIns="0" bIns="0" rtlCol="0" anchor="ctr"/>
-          <a:lstStyle/>
-          <a:p>
-            <a:pPr marL="0" indent="0">
-              <a:buNone/>
-            </a:pPr>
-            <a:r>
-              <a:rPr lang="en-US" sz="1350" b="1" dirty="0">
-                <a:solidFill>
-                  <a:srgbClr val="1E2761"/>
-                </a:solidFill>
-                <a:latin typeface="Calibri" pitchFamily="34" charset="0"/>
-                <a:ea typeface="Calibri" pitchFamily="34" charset="-122"/>
-                <a:cs typeface="Calibri" pitchFamily="34" charset="-120"/>
-              </a:rPr>
-              <a:t>model</a:t>
-            </a:r>
-            <a:endParaRPr lang="en-US" sz="1350" dirty="0"/>
-          </a:p>
-        </p:txBody>
-      </p:sp>
-      <p:sp>
-        <p:nvSpPr>
-          <p:cNvPr id="19" name="Text 17"/>
-          <p:cNvSpPr/>
-          <p:nvPr/>
-        </p:nvSpPr>
-        <p:spPr>
-          <a:xfrm>
-            <a:off x="7479792" y="2404872"/>
-            <a:ext cx="1847088" cy="868680"/>
-          </a:xfrm>
-          <a:prstGeom prst="rect">
-            <a:avLst/>
-          </a:prstGeom>
-          <a:noFill/>
-          <a:ln/>
-        </p:spPr>
-        <p:txBody>
-          <a:bodyPr wrap="square" lIns="0" tIns="0" rIns="0" bIns="0" rtlCol="0" anchor="ctr"/>
-          <a:lstStyle/>
-          <a:p>
-            <a:pPr marL="0" indent="0">
-              <a:lnSpc>
-                <a:spcPct val="120000"/>
-              </a:lnSpc>
-              <a:buNone/>
-            </a:pPr>
-            <a:r>
-              <a:rPr lang="en-US" sz="950" dirty="0">
-                <a:solidFill>
-                  <a:srgbClr val="5A6B87"/>
-                </a:solidFill>
-                <a:latin typeface="Calibri" pitchFamily="34" charset="0"/>
-                <a:ea typeface="Calibri" pitchFamily="34" charset="-122"/>
-                <a:cs typeface="Calibri" pitchFamily="34" charset="-120"/>
-              </a:rPr>
-              <a:t>Order · OrderRow</a:t>
-            </a:r>
-            <a:endParaRPr lang="en-US" sz="950" dirty="0"/>
-          </a:p>
-          <a:p>
-            <a:pPr marL="0" indent="0">
-              <a:lnSpc>
-                <a:spcPct val="120000"/>
-              </a:lnSpc>
-              <a:buNone/>
-            </a:pPr>
-            <a:r>
-              <a:rPr lang="en-US" sz="950" dirty="0">
-                <a:solidFill>
-                  <a:srgbClr val="5A6B87"/>
-                </a:solidFill>
-                <a:latin typeface="Calibri" pitchFamily="34" charset="0"/>
-                <a:ea typeface="Calibri" pitchFamily="34" charset="-122"/>
-                <a:cs typeface="Calibri" pitchFamily="34" charset="-120"/>
-              </a:rPr>
-              <a:t>DummyOrderRow</a:t>
-            </a:r>
-            <a:endParaRPr lang="en-US" sz="950" dirty="0"/>
-          </a:p>
-        </p:txBody>
-      </p:sp>
-      <p:sp>
-        <p:nvSpPr>
-          <p:cNvPr id="20" name="Shape 18"/>
-          <p:cNvSpPr/>
-          <p:nvPr/>
-        </p:nvSpPr>
-        <p:spPr>
-          <a:xfrm>
-            <a:off x="9619488" y="1691640"/>
-            <a:ext cx="2103120" cy="1691640"/>
-          </a:xfrm>
-          <a:prstGeom prst="roundRect">
-            <a:avLst>
-              <a:gd name="adj" fmla="val 4324"/>
-            </a:avLst>
-          </a:prstGeom>
-          <a:solidFill>
-            <a:srgbClr val="F4F7FC"/>
-          </a:solidFill>
-          <a:ln/>
-          <a:effectLst>
-            <a:outerShdw blurRad="76200" dist="25400" dir="5400000" algn="bl" rotWithShape="0">
-              <a:srgbClr val="1E2761">
-                <a:alpha val="12000"/>
-              </a:srgbClr>
-            </a:outerShdw>
-          </a:effectLst>
-        </p:spPr>
-        <p:txBody>
-          <a:bodyPr/>
-          <a:lstStyle/>
-          <a:p>
-            <a:endParaRPr lang="en-IN"/>
-          </a:p>
-        </p:txBody>
-      </p:sp>
-      <p:sp>
-        <p:nvSpPr>
-          <p:cNvPr id="21" name="Shape 19"/>
-          <p:cNvSpPr/>
-          <p:nvPr/>
-        </p:nvSpPr>
-        <p:spPr>
-          <a:xfrm>
-            <a:off x="9765792" y="1837944"/>
-            <a:ext cx="310896" cy="91440"/>
-          </a:xfrm>
-          <a:prstGeom prst="roundRect">
-            <a:avLst>
-              <a:gd name="adj" fmla="val 50000"/>
-            </a:avLst>
-          </a:prstGeom>
-          <a:solidFill>
-            <a:srgbClr val="F2C14E"/>
-          </a:solidFill>
-          <a:ln/>
-        </p:spPr>
-        <p:txBody>
-          <a:bodyPr/>
-          <a:lstStyle/>
-          <a:p>
-            <a:endParaRPr lang="en-IN"/>
-          </a:p>
-        </p:txBody>
-      </p:sp>
-      <p:sp>
-        <p:nvSpPr>
-          <p:cNvPr id="22" name="Text 20"/>
-          <p:cNvSpPr/>
-          <p:nvPr/>
-        </p:nvSpPr>
-        <p:spPr>
-          <a:xfrm>
-            <a:off x="9747504" y="2002536"/>
-            <a:ext cx="1847088" cy="384048"/>
-          </a:xfrm>
-          <a:prstGeom prst="rect">
-            <a:avLst/>
-          </a:prstGeom>
-          <a:noFill/>
-          <a:ln/>
-        </p:spPr>
-        <p:txBody>
-          <a:bodyPr wrap="square" lIns="0" tIns="0" rIns="0" bIns="0" rtlCol="0" anchor="ctr"/>
-          <a:lstStyle/>
-          <a:p>
-            <a:pPr marL="0" indent="0">
-              <a:buNone/>
-            </a:pPr>
-            <a:r>
-              <a:rPr lang="en-US" sz="1350" b="1" dirty="0">
-                <a:solidFill>
-                  <a:srgbClr val="1E2761"/>
-                </a:solidFill>
-                <a:latin typeface="Calibri" pitchFamily="34" charset="0"/>
-                <a:ea typeface="Calibri" pitchFamily="34" charset="-122"/>
-                <a:cs typeface="Calibri" pitchFamily="34" charset="-120"/>
-              </a:rPr>
-              <a:t>repository</a:t>
-            </a:r>
-            <a:endParaRPr lang="en-US" sz="1350" dirty="0"/>
-          </a:p>
-        </p:txBody>
-      </p:sp>
-      <p:sp>
-        <p:nvSpPr>
-          <p:cNvPr id="23" name="Text 21"/>
-          <p:cNvSpPr/>
-          <p:nvPr/>
-        </p:nvSpPr>
-        <p:spPr>
-          <a:xfrm>
-            <a:off x="9747504" y="2404872"/>
-            <a:ext cx="1847088" cy="868680"/>
-          </a:xfrm>
-          <a:prstGeom prst="rect">
-            <a:avLst/>
-          </a:prstGeom>
-          <a:noFill/>
-          <a:ln/>
-        </p:spPr>
-        <p:txBody>
-          <a:bodyPr wrap="square" lIns="0" tIns="0" rIns="0" bIns="0" rtlCol="0" anchor="ctr"/>
-          <a:lstStyle/>
-          <a:p>
-            <a:pPr marL="0" indent="0">
-              <a:lnSpc>
-                <a:spcPct val="120000"/>
-              </a:lnSpc>
-              <a:buNone/>
-            </a:pPr>
-            <a:r>
-              <a:rPr lang="en-US" sz="950" dirty="0">
-                <a:solidFill>
-                  <a:srgbClr val="5A6B87"/>
-                </a:solidFill>
-                <a:latin typeface="Calibri" pitchFamily="34" charset="0"/>
-                <a:ea typeface="Calibri" pitchFamily="34" charset="-122"/>
-                <a:cs typeface="Calibri" pitchFamily="34" charset="-120"/>
-              </a:rPr>
-              <a:t>OrderRepository</a:t>
-            </a:r>
-            <a:endParaRPr lang="en-US" sz="950" dirty="0"/>
-          </a:p>
-        </p:txBody>
-      </p:sp>
-      <p:sp>
-        <p:nvSpPr>
-          <p:cNvPr id="24" name="Shape 22"/>
-          <p:cNvSpPr/>
-          <p:nvPr/>
-        </p:nvSpPr>
-        <p:spPr>
-          <a:xfrm>
-            <a:off x="548640" y="3584448"/>
-            <a:ext cx="2103120" cy="1691640"/>
-          </a:xfrm>
-          <a:prstGeom prst="roundRect">
-            <a:avLst>
-              <a:gd name="adj" fmla="val 4324"/>
-            </a:avLst>
-          </a:prstGeom>
-          <a:solidFill>
-            <a:srgbClr val="F4F7FC"/>
-          </a:solidFill>
-          <a:ln/>
-          <a:effectLst>
-            <a:outerShdw blurRad="76200" dist="25400" dir="5400000" algn="bl" rotWithShape="0">
-              <a:srgbClr val="1E2761">
-                <a:alpha val="12000"/>
-              </a:srgbClr>
-            </a:outerShdw>
-          </a:effectLst>
-        </p:spPr>
-        <p:txBody>
-          <a:bodyPr/>
-          <a:lstStyle/>
-          <a:p>
-            <a:endParaRPr lang="en-IN"/>
-          </a:p>
-        </p:txBody>
-      </p:sp>
-      <p:sp>
-        <p:nvSpPr>
-          <p:cNvPr id="25" name="Shape 23"/>
-          <p:cNvSpPr/>
-          <p:nvPr/>
-        </p:nvSpPr>
-        <p:spPr>
-          <a:xfrm>
-            <a:off x="694944" y="3730752"/>
-            <a:ext cx="310896" cy="91440"/>
-          </a:xfrm>
-          <a:prstGeom prst="roundRect">
-            <a:avLst>
-              <a:gd name="adj" fmla="val 50000"/>
-            </a:avLst>
-          </a:prstGeom>
-          <a:solidFill>
-            <a:srgbClr val="F2C14E"/>
-          </a:solidFill>
-          <a:ln/>
-        </p:spPr>
-        <p:txBody>
-          <a:bodyPr/>
-          <a:lstStyle/>
-          <a:p>
-            <a:endParaRPr lang="en-IN"/>
-          </a:p>
-        </p:txBody>
-      </p:sp>
-      <p:sp>
-        <p:nvSpPr>
-          <p:cNvPr id="26" name="Text 24"/>
-          <p:cNvSpPr/>
-          <p:nvPr/>
-        </p:nvSpPr>
-        <p:spPr>
-          <a:xfrm>
-            <a:off x="676656" y="3895344"/>
-            <a:ext cx="1847088" cy="384048"/>
-          </a:xfrm>
-          <a:prstGeom prst="rect">
-            <a:avLst/>
-          </a:prstGeom>
-          <a:noFill/>
-          <a:ln/>
-        </p:spPr>
-        <p:txBody>
-          <a:bodyPr wrap="square" lIns="0" tIns="0" rIns="0" bIns="0" rtlCol="0" anchor="ctr"/>
-          <a:lstStyle/>
-          <a:p>
-            <a:pPr marL="0" indent="0">
-              <a:buNone/>
-            </a:pPr>
-            <a:r>
-              <a:rPr lang="en-US" sz="1350" b="1" dirty="0">
-                <a:solidFill>
-                  <a:srgbClr val="1E2761"/>
-                </a:solidFill>
-                <a:latin typeface="Calibri" pitchFamily="34" charset="0"/>
-                <a:ea typeface="Calibri" pitchFamily="34" charset="-122"/>
-                <a:cs typeface="Calibri" pitchFamily="34" charset="-120"/>
-              </a:rPr>
-              <a:t>report</a:t>
-            </a:r>
-            <a:endParaRPr lang="en-US" sz="1350" dirty="0"/>
-          </a:p>
-        </p:txBody>
-      </p:sp>
-      <p:sp>
-        <p:nvSpPr>
-          <p:cNvPr id="27" name="Text 25"/>
-          <p:cNvSpPr/>
-          <p:nvPr/>
-        </p:nvSpPr>
-        <p:spPr>
-          <a:xfrm>
-            <a:off x="676656" y="4297680"/>
-            <a:ext cx="1847088" cy="868680"/>
-          </a:xfrm>
-          <a:prstGeom prst="rect">
-            <a:avLst/>
-          </a:prstGeom>
-          <a:noFill/>
-          <a:ln/>
-        </p:spPr>
-        <p:txBody>
-          <a:bodyPr wrap="square" lIns="0" tIns="0" rIns="0" bIns="0" rtlCol="0" anchor="ctr"/>
-          <a:lstStyle/>
-          <a:p>
-            <a:pPr marL="0" indent="0">
-              <a:lnSpc>
-                <a:spcPct val="120000"/>
-              </a:lnSpc>
-              <a:buNone/>
-            </a:pPr>
-            <a:r>
-              <a:rPr lang="en-US" sz="950" dirty="0">
-                <a:solidFill>
-                  <a:srgbClr val="5A6B87"/>
-                </a:solidFill>
-                <a:latin typeface="Calibri" pitchFamily="34" charset="0"/>
-                <a:ea typeface="Calibri" pitchFamily="34" charset="-122"/>
-                <a:cs typeface="Calibri" pitchFamily="34" charset="-120"/>
-              </a:rPr>
-              <a:t>ExtentManager</a:t>
-            </a:r>
-            <a:endParaRPr lang="en-US" sz="950" dirty="0"/>
-          </a:p>
-          <a:p>
-            <a:pPr marL="0" indent="0">
-              <a:lnSpc>
-                <a:spcPct val="120000"/>
-              </a:lnSpc>
-              <a:buNone/>
-            </a:pPr>
-            <a:r>
-              <a:rPr lang="en-US" sz="950" dirty="0">
-                <a:solidFill>
-                  <a:srgbClr val="5A6B87"/>
-                </a:solidFill>
-                <a:latin typeface="Calibri" pitchFamily="34" charset="0"/>
-                <a:ea typeface="Calibri" pitchFamily="34" charset="-122"/>
-                <a:cs typeface="Calibri" pitchFamily="34" charset="-120"/>
-              </a:rPr>
-              <a:t>ExtentTestListener</a:t>
-            </a:r>
-            <a:endParaRPr lang="en-US" sz="950" dirty="0"/>
-          </a:p>
-        </p:txBody>
-      </p:sp>
-      <p:sp>
-        <p:nvSpPr>
-          <p:cNvPr id="28" name="Shape 26"/>
-          <p:cNvSpPr/>
-          <p:nvPr/>
-        </p:nvSpPr>
-        <p:spPr>
-          <a:xfrm>
-            <a:off x="2816352" y="3584448"/>
-            <a:ext cx="2103120" cy="1691640"/>
-          </a:xfrm>
-          <a:prstGeom prst="roundRect">
-            <a:avLst>
-              <a:gd name="adj" fmla="val 4324"/>
-            </a:avLst>
-          </a:prstGeom>
-          <a:solidFill>
-            <a:srgbClr val="F4F7FC"/>
-          </a:solidFill>
-          <a:ln/>
-          <a:effectLst>
-            <a:outerShdw blurRad="76200" dist="25400" dir="5400000" algn="bl" rotWithShape="0">
-              <a:srgbClr val="1E2761">
-                <a:alpha val="12000"/>
-              </a:srgbClr>
-            </a:outerShdw>
-          </a:effectLst>
-        </p:spPr>
-        <p:txBody>
-          <a:bodyPr/>
-          <a:lstStyle/>
-          <a:p>
-            <a:endParaRPr lang="en-IN"/>
-          </a:p>
-        </p:txBody>
-      </p:sp>
-      <p:sp>
-        <p:nvSpPr>
-          <p:cNvPr id="29" name="Shape 27"/>
-          <p:cNvSpPr/>
-          <p:nvPr/>
-        </p:nvSpPr>
-        <p:spPr>
-          <a:xfrm>
-            <a:off x="2962656" y="3730752"/>
-            <a:ext cx="310896" cy="91440"/>
-          </a:xfrm>
-          <a:prstGeom prst="roundRect">
-            <a:avLst>
-              <a:gd name="adj" fmla="val 50000"/>
-            </a:avLst>
-          </a:prstGeom>
-          <a:solidFill>
-            <a:srgbClr val="F2C14E"/>
-          </a:solidFill>
-          <a:ln/>
-        </p:spPr>
-        <p:txBody>
-          <a:bodyPr/>
-          <a:lstStyle/>
-          <a:p>
-            <a:endParaRPr lang="en-IN"/>
-          </a:p>
-        </p:txBody>
-      </p:sp>
-      <p:sp>
-        <p:nvSpPr>
-          <p:cNvPr id="30" name="Text 28"/>
-          <p:cNvSpPr/>
-          <p:nvPr/>
-        </p:nvSpPr>
-        <p:spPr>
-          <a:xfrm>
-            <a:off x="2944368" y="3895344"/>
-            <a:ext cx="1847088" cy="384048"/>
-          </a:xfrm>
-          <a:prstGeom prst="rect">
-            <a:avLst/>
-          </a:prstGeom>
-          <a:noFill/>
-          <a:ln/>
-        </p:spPr>
-        <p:txBody>
-          <a:bodyPr wrap="square" lIns="0" tIns="0" rIns="0" bIns="0" rtlCol="0" anchor="ctr"/>
-          <a:lstStyle/>
-          <a:p>
-            <a:pPr marL="0" indent="0">
-              <a:buNone/>
-            </a:pPr>
-            <a:r>
-              <a:rPr lang="en-US" sz="1350" b="1" dirty="0">
-                <a:solidFill>
-                  <a:srgbClr val="1E2761"/>
-                </a:solidFill>
-                <a:latin typeface="Calibri" pitchFamily="34" charset="0"/>
-                <a:ea typeface="Calibri" pitchFamily="34" charset="-122"/>
-                <a:cs typeface="Calibri" pitchFamily="34" charset="-120"/>
-              </a:rPr>
-              <a:t>support</a:t>
-            </a:r>
-            <a:endParaRPr lang="en-US" sz="1350" dirty="0"/>
-          </a:p>
-        </p:txBody>
-      </p:sp>
-      <p:sp>
-        <p:nvSpPr>
-          <p:cNvPr id="31" name="Text 29"/>
-          <p:cNvSpPr/>
-          <p:nvPr/>
-        </p:nvSpPr>
-        <p:spPr>
-          <a:xfrm>
-            <a:off x="2944368" y="4297680"/>
-            <a:ext cx="1847088" cy="868680"/>
-          </a:xfrm>
-          <a:prstGeom prst="rect">
-            <a:avLst/>
-          </a:prstGeom>
-          <a:noFill/>
-          <a:ln/>
-        </p:spPr>
-        <p:txBody>
-          <a:bodyPr wrap="square" lIns="0" tIns="0" rIns="0" bIns="0" rtlCol="0" anchor="ctr"/>
-          <a:lstStyle/>
-          <a:p>
-            <a:pPr marL="0" indent="0">
-              <a:lnSpc>
-                <a:spcPct val="120000"/>
-              </a:lnSpc>
-              <a:buNone/>
-            </a:pPr>
-            <a:r>
-              <a:rPr lang="en-US" sz="950" dirty="0">
-                <a:solidFill>
-                  <a:srgbClr val="5A6B87"/>
-                </a:solidFill>
-                <a:latin typeface="Calibri" pitchFamily="34" charset="0"/>
-                <a:ea typeface="Calibri" pitchFamily="34" charset="-122"/>
-                <a:cs typeface="Calibri" pitchFamily="34" charset="-120"/>
-              </a:rPr>
-              <a:t>DbSupport · Hooks</a:t>
-            </a:r>
-            <a:endParaRPr lang="en-US" sz="950" dirty="0"/>
-          </a:p>
-          <a:p>
-            <a:pPr marL="0" indent="0">
-              <a:lnSpc>
-                <a:spcPct val="120000"/>
-              </a:lnSpc>
-              <a:buNone/>
-            </a:pPr>
-            <a:r>
-              <a:rPr lang="en-US" sz="950" dirty="0">
-                <a:solidFill>
-                  <a:srgbClr val="5A6B87"/>
-                </a:solidFill>
-                <a:latin typeface="Calibri" pitchFamily="34" charset="0"/>
-                <a:ea typeface="Calibri" pitchFamily="34" charset="-122"/>
-                <a:cs typeface="Calibri" pitchFamily="34" charset="-120"/>
-              </a:rPr>
-              <a:t>TestEnvironment · World</a:t>
-            </a:r>
-            <a:endParaRPr lang="en-US" sz="950" dirty="0"/>
-          </a:p>
-        </p:txBody>
-      </p:sp>
-      <p:sp>
-        <p:nvSpPr>
-          <p:cNvPr id="32" name="Shape 30"/>
-          <p:cNvSpPr/>
-          <p:nvPr/>
-        </p:nvSpPr>
-        <p:spPr>
-          <a:xfrm>
-            <a:off x="5084064" y="3584448"/>
-            <a:ext cx="2103120" cy="1691640"/>
-          </a:xfrm>
-          <a:prstGeom prst="roundRect">
-            <a:avLst>
-              <a:gd name="adj" fmla="val 4324"/>
-            </a:avLst>
-          </a:prstGeom>
-          <a:solidFill>
-            <a:srgbClr val="F4F7FC"/>
-          </a:solidFill>
-          <a:ln/>
-          <a:effectLst>
-            <a:outerShdw blurRad="76200" dist="25400" dir="5400000" algn="bl" rotWithShape="0">
-              <a:srgbClr val="1E2761">
-                <a:alpha val="12000"/>
-              </a:srgbClr>
-            </a:outerShdw>
-          </a:effectLst>
-        </p:spPr>
-        <p:txBody>
-          <a:bodyPr/>
-          <a:lstStyle/>
-          <a:p>
-            <a:endParaRPr lang="en-IN"/>
-          </a:p>
-        </p:txBody>
-      </p:sp>
-      <p:sp>
-        <p:nvSpPr>
-          <p:cNvPr id="33" name="Shape 31"/>
-          <p:cNvSpPr/>
-          <p:nvPr/>
-        </p:nvSpPr>
-        <p:spPr>
-          <a:xfrm>
-            <a:off x="5230368" y="3730752"/>
-            <a:ext cx="310896" cy="91440"/>
-          </a:xfrm>
-          <a:prstGeom prst="roundRect">
-            <a:avLst>
-              <a:gd name="adj" fmla="val 50000"/>
-            </a:avLst>
-          </a:prstGeom>
-          <a:solidFill>
-            <a:srgbClr val="2FA36B"/>
-          </a:solidFill>
-          <a:ln/>
-        </p:spPr>
-        <p:txBody>
-          <a:bodyPr/>
-          <a:lstStyle/>
-          <a:p>
-            <a:endParaRPr lang="en-IN"/>
-          </a:p>
-        </p:txBody>
-      </p:sp>
-      <p:sp>
-        <p:nvSpPr>
-          <p:cNvPr id="34" name="Text 32"/>
-          <p:cNvSpPr/>
-          <p:nvPr/>
-        </p:nvSpPr>
-        <p:spPr>
-          <a:xfrm>
-            <a:off x="5212080" y="3895344"/>
-            <a:ext cx="1847088" cy="384048"/>
-          </a:xfrm>
-          <a:prstGeom prst="rect">
-            <a:avLst/>
-          </a:prstGeom>
-          <a:noFill/>
-          <a:ln/>
-        </p:spPr>
-        <p:txBody>
-          <a:bodyPr wrap="square" lIns="0" tIns="0" rIns="0" bIns="0" rtlCol="0" anchor="ctr"/>
-          <a:lstStyle/>
-          <a:p>
-            <a:pPr marL="0" indent="0">
-              <a:buNone/>
-            </a:pPr>
-            <a:r>
-              <a:rPr lang="en-US" sz="1350" b="1" dirty="0">
-                <a:solidFill>
-                  <a:srgbClr val="1E2761"/>
-                </a:solidFill>
-                <a:latin typeface="Calibri" pitchFamily="34" charset="0"/>
-                <a:ea typeface="Calibri" pitchFamily="34" charset="-122"/>
-                <a:cs typeface="Calibri" pitchFamily="34" charset="-120"/>
-              </a:rPr>
-              <a:t>stepdefs</a:t>
-            </a:r>
-            <a:endParaRPr lang="en-US" sz="1350" dirty="0"/>
-          </a:p>
-        </p:txBody>
-      </p:sp>
-      <p:sp>
-        <p:nvSpPr>
-          <p:cNvPr id="35" name="Text 33"/>
-          <p:cNvSpPr/>
-          <p:nvPr/>
-        </p:nvSpPr>
-        <p:spPr>
-          <a:xfrm>
-            <a:off x="5212080" y="4297680"/>
-            <a:ext cx="1847088" cy="868680"/>
-          </a:xfrm>
-          <a:prstGeom prst="rect">
-            <a:avLst/>
-          </a:prstGeom>
-          <a:noFill/>
-          <a:ln/>
-        </p:spPr>
-        <p:txBody>
-          <a:bodyPr wrap="square" lIns="0" tIns="0" rIns="0" bIns="0" rtlCol="0" anchor="ctr"/>
-          <a:lstStyle/>
-          <a:p>
-            <a:pPr marL="0" indent="0">
-              <a:lnSpc>
-                <a:spcPct val="120000"/>
-              </a:lnSpc>
-              <a:buNone/>
-            </a:pPr>
-            <a:r>
-              <a:rPr lang="en-US" sz="950" dirty="0">
-                <a:solidFill>
-                  <a:srgbClr val="5A6B87"/>
-                </a:solidFill>
-                <a:latin typeface="Calibri" pitchFamily="34" charset="0"/>
-                <a:ea typeface="Calibri" pitchFamily="34" charset="-122"/>
-                <a:cs typeface="Calibri" pitchFamily="34" charset="-120"/>
-              </a:rPr>
-              <a:t>CheckoutSteps</a:t>
-            </a:r>
-            <a:endParaRPr lang="en-US" sz="950" dirty="0"/>
-          </a:p>
-          <a:p>
-            <a:pPr marL="0" indent="0">
-              <a:lnSpc>
-                <a:spcPct val="120000"/>
-              </a:lnSpc>
-              <a:buNone/>
-            </a:pPr>
-            <a:r>
-              <a:rPr lang="en-US" sz="950" dirty="0">
-                <a:solidFill>
-                  <a:srgbClr val="5A6B87"/>
-                </a:solidFill>
-                <a:latin typeface="Calibri" pitchFamily="34" charset="0"/>
-                <a:ea typeface="Calibri" pitchFamily="34" charset="-122"/>
-                <a:cs typeface="Calibri" pitchFamily="34" charset="-120"/>
-              </a:rPr>
-              <a:t>SearchProductsSteps</a:t>
-            </a:r>
-            <a:endParaRPr lang="en-US" sz="950" dirty="0"/>
-          </a:p>
-        </p:txBody>
-      </p:sp>
-      <p:sp>
-        <p:nvSpPr>
-          <p:cNvPr id="36" name="Shape 34"/>
-          <p:cNvSpPr/>
-          <p:nvPr/>
-        </p:nvSpPr>
-        <p:spPr>
-          <a:xfrm>
-            <a:off x="7351776" y="3584448"/>
-            <a:ext cx="2103120" cy="1691640"/>
-          </a:xfrm>
-          <a:prstGeom prst="roundRect">
-            <a:avLst>
-              <a:gd name="adj" fmla="val 4324"/>
-            </a:avLst>
-          </a:prstGeom>
-          <a:solidFill>
-            <a:srgbClr val="F4F7FC"/>
-          </a:solidFill>
-          <a:ln/>
-          <a:effectLst>
-            <a:outerShdw blurRad="76200" dist="25400" dir="5400000" algn="bl" rotWithShape="0">
-              <a:srgbClr val="1E2761">
-                <a:alpha val="12000"/>
-              </a:srgbClr>
-            </a:outerShdw>
-          </a:effectLst>
-        </p:spPr>
-        <p:txBody>
-          <a:bodyPr/>
-          <a:lstStyle/>
-          <a:p>
-            <a:endParaRPr lang="en-IN"/>
-          </a:p>
-        </p:txBody>
-      </p:sp>
-      <p:sp>
-        <p:nvSpPr>
-          <p:cNvPr id="37" name="Shape 35"/>
-          <p:cNvSpPr/>
-          <p:nvPr/>
-        </p:nvSpPr>
-        <p:spPr>
-          <a:xfrm>
-            <a:off x="7498080" y="3730752"/>
-            <a:ext cx="310896" cy="91440"/>
-          </a:xfrm>
-          <a:prstGeom prst="roundRect">
-            <a:avLst>
-              <a:gd name="adj" fmla="val 50000"/>
-            </a:avLst>
-          </a:prstGeom>
-          <a:solidFill>
-            <a:srgbClr val="2FA36B"/>
-          </a:solidFill>
-          <a:ln/>
-        </p:spPr>
-        <p:txBody>
-          <a:bodyPr/>
-          <a:lstStyle/>
-          <a:p>
-            <a:endParaRPr lang="en-IN"/>
-          </a:p>
-        </p:txBody>
-      </p:sp>
-      <p:sp>
-        <p:nvSpPr>
-          <p:cNvPr id="38" name="Text 36"/>
-          <p:cNvSpPr/>
-          <p:nvPr/>
-        </p:nvSpPr>
-        <p:spPr>
-          <a:xfrm>
-            <a:off x="7479792" y="3895344"/>
-            <a:ext cx="1847088" cy="384048"/>
-          </a:xfrm>
-          <a:prstGeom prst="rect">
-            <a:avLst/>
-          </a:prstGeom>
-          <a:noFill/>
-          <a:ln/>
-        </p:spPr>
-        <p:txBody>
-          <a:bodyPr wrap="square" lIns="0" tIns="0" rIns="0" bIns="0" rtlCol="0" anchor="ctr"/>
-          <a:lstStyle/>
-          <a:p>
-            <a:pPr marL="0" indent="0">
-              <a:buNone/>
-            </a:pPr>
-            <a:r>
-              <a:rPr lang="en-US" sz="1350" b="1" dirty="0">
-                <a:solidFill>
-                  <a:srgbClr val="1E2761"/>
-                </a:solidFill>
-                <a:latin typeface="Calibri" pitchFamily="34" charset="0"/>
-                <a:ea typeface="Calibri" pitchFamily="34" charset="-122"/>
-                <a:cs typeface="Calibri" pitchFamily="34" charset="-120"/>
-              </a:rPr>
-              <a:t>tests</a:t>
-            </a:r>
-            <a:endParaRPr lang="en-US" sz="1350" dirty="0"/>
-          </a:p>
-        </p:txBody>
-      </p:sp>
-      <p:sp>
-        <p:nvSpPr>
-          <p:cNvPr id="39" name="Text 37"/>
-          <p:cNvSpPr/>
-          <p:nvPr/>
-        </p:nvSpPr>
-        <p:spPr>
-          <a:xfrm>
-            <a:off x="7479792" y="4297680"/>
-            <a:ext cx="1847088" cy="868680"/>
-          </a:xfrm>
-          <a:prstGeom prst="rect">
-            <a:avLst/>
-          </a:prstGeom>
-          <a:noFill/>
-          <a:ln/>
-        </p:spPr>
-        <p:txBody>
-          <a:bodyPr wrap="square" lIns="0" tIns="0" rIns="0" bIns="0" rtlCol="0" anchor="ctr"/>
-          <a:lstStyle/>
-          <a:p>
-            <a:pPr marL="0" indent="0">
-              <a:lnSpc>
-                <a:spcPct val="120000"/>
-              </a:lnSpc>
-              <a:buNone/>
-            </a:pPr>
-            <a:r>
-              <a:rPr lang="en-US" sz="950" dirty="0">
-                <a:solidFill>
-                  <a:srgbClr val="5A6B87"/>
-                </a:solidFill>
-                <a:latin typeface="Calibri" pitchFamily="34" charset="0"/>
-                <a:ea typeface="Calibri" pitchFamily="34" charset="-122"/>
-                <a:cs typeface="Calibri" pitchFamily="34" charset="-120"/>
-              </a:rPr>
-              <a:t>CheckoutE2ETest · CancelOrderApiTest</a:t>
-            </a:r>
-            <a:endParaRPr lang="en-US" sz="950" dirty="0"/>
-          </a:p>
-          <a:p>
-            <a:pPr marL="0" indent="0">
-              <a:lnSpc>
-                <a:spcPct val="120000"/>
-              </a:lnSpc>
-              <a:buNone/>
-            </a:pPr>
-            <a:r>
-              <a:rPr lang="en-US" sz="950" dirty="0">
-                <a:solidFill>
-                  <a:srgbClr val="5A6B87"/>
-                </a:solidFill>
-                <a:latin typeface="Calibri" pitchFamily="34" charset="0"/>
-                <a:ea typeface="Calibri" pitchFamily="34" charset="-122"/>
-                <a:cs typeface="Calibri" pitchFamily="34" charset="-120"/>
-              </a:rPr>
-              <a:t>OrderAccessApiTest · TotalCartApiTest ...</a:t>
-            </a:r>
-            <a:endParaRPr lang="en-US" sz="950" dirty="0"/>
-          </a:p>
-        </p:txBody>
-      </p:sp>
-      <p:sp>
-        <p:nvSpPr>
-          <p:cNvPr id="40" name="Shape 38"/>
-          <p:cNvSpPr/>
-          <p:nvPr/>
-        </p:nvSpPr>
-        <p:spPr>
-          <a:xfrm>
-            <a:off x="9619488" y="3584448"/>
-            <a:ext cx="2103120" cy="1691640"/>
-          </a:xfrm>
-          <a:prstGeom prst="roundRect">
-            <a:avLst>
-              <a:gd name="adj" fmla="val 4324"/>
-            </a:avLst>
-          </a:prstGeom>
-          <a:solidFill>
-            <a:srgbClr val="F4F7FC"/>
-          </a:solidFill>
-          <a:ln/>
-          <a:effectLst>
-            <a:outerShdw blurRad="76200" dist="25400" dir="5400000" algn="bl" rotWithShape="0">
-              <a:srgbClr val="1E2761">
-                <a:alpha val="12000"/>
-              </a:srgbClr>
-            </a:outerShdw>
-          </a:effectLst>
-        </p:spPr>
-        <p:txBody>
-          <a:bodyPr/>
-          <a:lstStyle/>
-          <a:p>
-            <a:endParaRPr lang="en-IN"/>
-          </a:p>
-        </p:txBody>
-      </p:sp>
-      <p:sp>
-        <p:nvSpPr>
-          <p:cNvPr id="41" name="Shape 39"/>
-          <p:cNvSpPr/>
-          <p:nvPr/>
-        </p:nvSpPr>
-        <p:spPr>
-          <a:xfrm>
-            <a:off x="9765792" y="3730752"/>
-            <a:ext cx="310896" cy="91440"/>
-          </a:xfrm>
-          <a:prstGeom prst="roundRect">
-            <a:avLst>
-              <a:gd name="adj" fmla="val 50000"/>
-            </a:avLst>
-          </a:prstGeom>
-          <a:solidFill>
-            <a:srgbClr val="2FA36B"/>
-          </a:solidFill>
-          <a:ln/>
-        </p:spPr>
-        <p:txBody>
-          <a:bodyPr/>
-          <a:lstStyle/>
-          <a:p>
-            <a:endParaRPr lang="en-IN"/>
-          </a:p>
-        </p:txBody>
-      </p:sp>
-      <p:sp>
-        <p:nvSpPr>
-          <p:cNvPr id="42" name="Text 40"/>
-          <p:cNvSpPr/>
-          <p:nvPr/>
-        </p:nvSpPr>
-        <p:spPr>
-          <a:xfrm>
-            <a:off x="9747504" y="3895344"/>
-            <a:ext cx="1847088" cy="384048"/>
-          </a:xfrm>
-          <a:prstGeom prst="rect">
-            <a:avLst/>
-          </a:prstGeom>
-          <a:noFill/>
-          <a:ln/>
-        </p:spPr>
-        <p:txBody>
-          <a:bodyPr wrap="square" lIns="0" tIns="0" rIns="0" bIns="0" rtlCol="0" anchor="ctr"/>
-          <a:lstStyle/>
-          <a:p>
-            <a:pPr marL="0" indent="0">
-              <a:buNone/>
-            </a:pPr>
-            <a:r>
-              <a:rPr lang="en-US" sz="1350" b="1" dirty="0">
-                <a:solidFill>
-                  <a:srgbClr val="1E2761"/>
-                </a:solidFill>
-                <a:latin typeface="Calibri" pitchFamily="34" charset="0"/>
-                <a:ea typeface="Calibri" pitchFamily="34" charset="-122"/>
-                <a:cs typeface="Calibri" pitchFamily="34" charset="-120"/>
-              </a:rPr>
-              <a:t>ui</a:t>
-            </a:r>
-            <a:endParaRPr lang="en-US" sz="1350" dirty="0"/>
-          </a:p>
-        </p:txBody>
-      </p:sp>
-      <p:sp>
-        <p:nvSpPr>
-          <p:cNvPr id="43" name="Text 41"/>
-          <p:cNvSpPr/>
-          <p:nvPr/>
-        </p:nvSpPr>
-        <p:spPr>
-          <a:xfrm>
-            <a:off x="9747504" y="4297680"/>
-            <a:ext cx="1847088" cy="868680"/>
-          </a:xfrm>
-          <a:prstGeom prst="rect">
-            <a:avLst/>
-          </a:prstGeom>
-          <a:noFill/>
-          <a:ln/>
-        </p:spPr>
-        <p:txBody>
-          <a:bodyPr wrap="square" lIns="0" tIns="0" rIns="0" bIns="0" rtlCol="0" anchor="ctr"/>
-          <a:lstStyle/>
-          <a:p>
-            <a:pPr marL="0" indent="0">
-              <a:lnSpc>
-                <a:spcPct val="120000"/>
-              </a:lnSpc>
-              <a:buNone/>
-            </a:pPr>
-            <a:r>
-              <a:rPr lang="en-US" sz="950" dirty="0">
-                <a:solidFill>
-                  <a:srgbClr val="5A6B87"/>
-                </a:solidFill>
-                <a:latin typeface="Calibri" pitchFamily="34" charset="0"/>
-                <a:ea typeface="Calibri" pitchFamily="34" charset="-122"/>
-                <a:cs typeface="Calibri" pitchFamily="34" charset="-120"/>
-              </a:rPr>
-              <a:t>components · locators · pages</a:t>
-            </a:r>
-            <a:endParaRPr lang="en-US" sz="950" dirty="0"/>
-          </a:p>
-          <a:p>
-            <a:pPr marL="0" indent="0">
-              <a:lnSpc>
-                <a:spcPct val="120000"/>
-              </a:lnSpc>
-              <a:buNone/>
-            </a:pPr>
-            <a:r>
-              <a:rPr lang="en-US" sz="950" dirty="0">
-                <a:solidFill>
-                  <a:srgbClr val="5A6B87"/>
-                </a:solidFill>
-                <a:latin typeface="Calibri" pitchFamily="34" charset="0"/>
-                <a:ea typeface="Calibri" pitchFamily="34" charset="-122"/>
-                <a:cs typeface="Calibri" pitchFamily="34" charset="-120"/>
-              </a:rPr>
-              <a:t>(Page Object Model)</a:t>
-            </a:r>
-            <a:endParaRPr lang="en-US" sz="950" dirty="0"/>
-          </a:p>
-        </p:txBody>
-      </p:sp>
-      <p:sp>
-        <p:nvSpPr>
-          <p:cNvPr id="44" name="Text 42"/>
-          <p:cNvSpPr/>
-          <p:nvPr/>
-        </p:nvSpPr>
-        <p:spPr>
-          <a:xfrm>
-            <a:off x="11475720" y="6446520"/>
-            <a:ext cx="548640" cy="320040"/>
-          </a:xfrm>
-          <a:prstGeom prst="rect">
-            <a:avLst/>
-          </a:prstGeom>
-          <a:noFill/>
-          <a:ln/>
-        </p:spPr>
-        <p:txBody>
-          <a:bodyPr wrap="square" rtlCol="0" anchor="ctr"/>
-          <a:lstStyle/>
-          <a:p>
-            <a:pPr marL="0" indent="0" algn="r">
-              <a:buNone/>
-            </a:pPr>
-            <a:r>
-              <a:rPr lang="en-US" sz="1100" dirty="0">
-                <a:solidFill>
-                  <a:srgbClr val="5A6B87"/>
-                </a:solidFill>
-                <a:latin typeface="Calibri" pitchFamily="34" charset="0"/>
-                <a:ea typeface="Calibri" pitchFamily="34" charset="-122"/>
-                <a:cs typeface="Calibri" pitchFamily="34" charset="-120"/>
-              </a:rPr>
-              <a:t>03</a:t>
-            </a:r>
-            <a:endParaRPr lang="en-US" sz="1100" dirty="0"/>
-          </a:p>
-        </p:txBody>
-      </p:sp>
-    </p:spTree>
-  </p:cSld>
-  <p:clrMapOvr>
-    <a:masterClrMapping/>
-  </p:clrMapOvr>
-</p:sld>
-</file>
-
-<file path=ppt/slides/slide5.xml><?xml version="1.0" encoding="utf-8"?>
-<p:sld xmlns:a="http://schemas.openxmlformats.org/drawingml/2006/main" xmlns:r="http://schemas.openxmlformats.org/officeDocument/2006/relationships" xmlns:p="http://schemas.openxmlformats.org/presentationml/2006/main">
   <p:cSld name="Slide 4">
     <p:bg>
       <p:bgPr>
@@ -10970,6 +7799,181 @@
         </p:txBody>
       </p:sp>
     </p:spTree>
+  </p:cSld>
+  <p:clrMapOvr>
+    <a:masterClrMapping/>
+  </p:clrMapOvr>
+</p:sld>
+</file>
+
+<file path=ppt/slides/slide5.xml><?xml version="1.0" encoding="utf-8"?>
+<p:sld xmlns:a="http://schemas.openxmlformats.org/drawingml/2006/main" xmlns:r="http://schemas.openxmlformats.org/officeDocument/2006/relationships" xmlns:p="http://schemas.openxmlformats.org/presentationml/2006/main">
+  <p:cSld>
+    <p:spTree>
+      <p:nvGrpSpPr>
+        <p:cNvPr id="1" name=""/>
+        <p:cNvGrpSpPr/>
+        <p:nvPr/>
+      </p:nvGrpSpPr>
+      <p:grpSpPr>
+        <a:xfrm>
+          <a:off x="0" y="0"/>
+          <a:ext cx="0" cy="0"/>
+          <a:chOff x="0" y="0"/>
+          <a:chExt cx="0" cy="0"/>
+        </a:xfrm>
+      </p:grpSpPr>
+      <p:sp>
+        <p:nvSpPr>
+          <p:cNvPr id="16" name="TextBox 15">
+            <a:extLst>
+              <a:ext uri="{FF2B5EF4-FFF2-40B4-BE49-F238E27FC236}">
+                <a16:creationId xmlns:a16="http://schemas.microsoft.com/office/drawing/2014/main" id="{C61A0B0B-B6B9-9626-F452-6B17250A60AF}"/>
+              </a:ext>
+            </a:extLst>
+          </p:cNvPr>
+          <p:cNvSpPr txBox="1"/>
+          <p:nvPr/>
+        </p:nvSpPr>
+        <p:spPr>
+          <a:xfrm>
+            <a:off x="250372" y="381391"/>
+            <a:ext cx="6444343" cy="369332"/>
+          </a:xfrm>
+          <a:prstGeom prst="rect">
+            <a:avLst/>
+          </a:prstGeom>
+          <a:noFill/>
+        </p:spPr>
+        <p:txBody>
+          <a:bodyPr wrap="square" rtlCol="0">
+            <a:spAutoFit/>
+          </a:bodyPr>
+          <a:lstStyle/>
+          <a:p>
+            <a:r>
+              <a:rPr lang="en-IN" b="1" dirty="0">
+                <a:solidFill>
+                  <a:srgbClr val="FF0000"/>
+                </a:solidFill>
+              </a:rPr>
+              <a:t>Folder Structure(</a:t>
+            </a:r>
+            <a:r>
+              <a:rPr lang="en-IN" b="1" dirty="0" err="1">
+                <a:solidFill>
+                  <a:srgbClr val="FF0000"/>
+                </a:solidFill>
+              </a:rPr>
+              <a:t>Framwork</a:t>
+            </a:r>
+            <a:r>
+              <a:rPr lang="en-IN" b="1" dirty="0">
+                <a:solidFill>
+                  <a:srgbClr val="FF0000"/>
+                </a:solidFill>
+              </a:rPr>
+              <a:t>)</a:t>
+            </a:r>
+          </a:p>
+        </p:txBody>
+      </p:sp>
+      <p:pic>
+        <p:nvPicPr>
+          <p:cNvPr id="3" name="Picture 2">
+            <a:extLst>
+              <a:ext uri="{FF2B5EF4-FFF2-40B4-BE49-F238E27FC236}">
+                <a16:creationId xmlns:a16="http://schemas.microsoft.com/office/drawing/2014/main" id="{25ABB721-E12F-85FB-FE14-EA0ED2169AAA}"/>
+              </a:ext>
+            </a:extLst>
+          </p:cNvPr>
+          <p:cNvPicPr>
+            <a:picLocks noChangeAspect="1"/>
+          </p:cNvPicPr>
+          <p:nvPr/>
+        </p:nvPicPr>
+        <p:blipFill>
+          <a:blip r:embed="rId2"/>
+          <a:stretch>
+            <a:fillRect/>
+          </a:stretch>
+        </p:blipFill>
+        <p:spPr>
+          <a:xfrm>
+            <a:off x="151007" y="750723"/>
+            <a:ext cx="3920661" cy="5969307"/>
+          </a:xfrm>
+          <a:prstGeom prst="rect">
+            <a:avLst/>
+          </a:prstGeom>
+        </p:spPr>
+      </p:pic>
+      <p:pic>
+        <p:nvPicPr>
+          <p:cNvPr id="6" name="Picture 5">
+            <a:extLst>
+              <a:ext uri="{FF2B5EF4-FFF2-40B4-BE49-F238E27FC236}">
+                <a16:creationId xmlns:a16="http://schemas.microsoft.com/office/drawing/2014/main" id="{616DE16D-C2EF-225F-2D95-AB0D70377936}"/>
+              </a:ext>
+            </a:extLst>
+          </p:cNvPr>
+          <p:cNvPicPr>
+            <a:picLocks noChangeAspect="1"/>
+          </p:cNvPicPr>
+          <p:nvPr/>
+        </p:nvPicPr>
+        <p:blipFill>
+          <a:blip r:embed="rId3"/>
+          <a:stretch>
+            <a:fillRect/>
+          </a:stretch>
+        </p:blipFill>
+        <p:spPr>
+          <a:xfrm>
+            <a:off x="4199673" y="750723"/>
+            <a:ext cx="3920661" cy="5965370"/>
+          </a:xfrm>
+          <a:prstGeom prst="rect">
+            <a:avLst/>
+          </a:prstGeom>
+        </p:spPr>
+      </p:pic>
+      <p:pic>
+        <p:nvPicPr>
+          <p:cNvPr id="10" name="Picture 9">
+            <a:extLst>
+              <a:ext uri="{FF2B5EF4-FFF2-40B4-BE49-F238E27FC236}">
+                <a16:creationId xmlns:a16="http://schemas.microsoft.com/office/drawing/2014/main" id="{B85460F1-DE2D-476D-93BE-30EC86EF0544}"/>
+              </a:ext>
+            </a:extLst>
+          </p:cNvPr>
+          <p:cNvPicPr>
+            <a:picLocks noChangeAspect="1"/>
+          </p:cNvPicPr>
+          <p:nvPr/>
+        </p:nvPicPr>
+        <p:blipFill>
+          <a:blip r:embed="rId4"/>
+          <a:stretch>
+            <a:fillRect/>
+          </a:stretch>
+        </p:blipFill>
+        <p:spPr>
+          <a:xfrm>
+            <a:off x="8357513" y="274449"/>
+            <a:ext cx="3683480" cy="6445581"/>
+          </a:xfrm>
+          <a:prstGeom prst="rect">
+            <a:avLst/>
+          </a:prstGeom>
+        </p:spPr>
+      </p:pic>
+    </p:spTree>
+    <p:extLst>
+      <p:ext uri="{BB962C8B-B14F-4D97-AF65-F5344CB8AC3E}">
+        <p14:creationId xmlns:p14="http://schemas.microsoft.com/office/powerpoint/2010/main" val="4162541684"/>
+      </p:ext>
+    </p:extLst>
   </p:cSld>
   <p:clrMapOvr>
     <a:masterClrMapping/>
@@ -10996,10 +8000,10 @@
       </p:grpSpPr>
       <p:pic>
         <p:nvPicPr>
-          <p:cNvPr id="5" name="Picture 4">
+          <p:cNvPr id="3" name="Picture 2">
             <a:extLst>
               <a:ext uri="{FF2B5EF4-FFF2-40B4-BE49-F238E27FC236}">
-                <a16:creationId xmlns:a16="http://schemas.microsoft.com/office/drawing/2014/main" id="{5DAEAB3F-285C-7596-56B5-E779A2AC2ED8}"/>
+                <a16:creationId xmlns:a16="http://schemas.microsoft.com/office/drawing/2014/main" id="{CC124484-1EFC-F718-D709-580E7BA2F660}"/>
               </a:ext>
             </a:extLst>
           </p:cNvPr>
@@ -11016,243 +8020,8 @@
         </p:blipFill>
         <p:spPr>
           <a:xfrm>
-            <a:off x="135119" y="892629"/>
-            <a:ext cx="3903481" cy="5965371"/>
-          </a:xfrm>
-          <a:prstGeom prst="rect">
-            <a:avLst/>
-          </a:prstGeom>
-        </p:spPr>
-      </p:pic>
-      <p:pic>
-        <p:nvPicPr>
-          <p:cNvPr id="7" name="Picture 6">
-            <a:extLst>
-              <a:ext uri="{FF2B5EF4-FFF2-40B4-BE49-F238E27FC236}">
-                <a16:creationId xmlns:a16="http://schemas.microsoft.com/office/drawing/2014/main" id="{F4547478-3343-BC5B-C383-DC84294BE57C}"/>
-              </a:ext>
-            </a:extLst>
-          </p:cNvPr>
-          <p:cNvPicPr>
-            <a:picLocks noChangeAspect="1"/>
-          </p:cNvPicPr>
-          <p:nvPr/>
-        </p:nvPicPr>
-        <p:blipFill>
-          <a:blip r:embed="rId3"/>
-          <a:stretch>
-            <a:fillRect/>
-          </a:stretch>
-        </p:blipFill>
-        <p:spPr>
-          <a:xfrm>
-            <a:off x="4319752" y="892629"/>
-            <a:ext cx="3258207" cy="5965370"/>
-          </a:xfrm>
-          <a:prstGeom prst="rect">
-            <a:avLst/>
-          </a:prstGeom>
-        </p:spPr>
-      </p:pic>
-      <p:pic>
-        <p:nvPicPr>
-          <p:cNvPr id="9" name="Picture 8">
-            <a:extLst>
-              <a:ext uri="{FF2B5EF4-FFF2-40B4-BE49-F238E27FC236}">
-                <a16:creationId xmlns:a16="http://schemas.microsoft.com/office/drawing/2014/main" id="{9DE3E158-0996-D450-15A6-A6B851570FE1}"/>
-              </a:ext>
-            </a:extLst>
-          </p:cNvPr>
-          <p:cNvPicPr>
-            <a:picLocks noChangeAspect="1"/>
-          </p:cNvPicPr>
-          <p:nvPr/>
-        </p:nvPicPr>
-        <p:blipFill>
-          <a:blip r:embed="rId4"/>
-          <a:stretch>
-            <a:fillRect/>
-          </a:stretch>
-        </p:blipFill>
-        <p:spPr>
-          <a:xfrm>
-            <a:off x="8236584" y="892629"/>
-            <a:ext cx="3672096" cy="5965370"/>
-          </a:xfrm>
-          <a:prstGeom prst="rect">
-            <a:avLst/>
-          </a:prstGeom>
-        </p:spPr>
-      </p:pic>
-      <p:sp>
-        <p:nvSpPr>
-          <p:cNvPr id="16" name="TextBox 15">
-            <a:extLst>
-              <a:ext uri="{FF2B5EF4-FFF2-40B4-BE49-F238E27FC236}">
-                <a16:creationId xmlns:a16="http://schemas.microsoft.com/office/drawing/2014/main" id="{C61A0B0B-B6B9-9626-F452-6B17250A60AF}"/>
-              </a:ext>
-            </a:extLst>
-          </p:cNvPr>
-          <p:cNvSpPr txBox="1"/>
-          <p:nvPr/>
-        </p:nvSpPr>
-        <p:spPr>
-          <a:xfrm>
-            <a:off x="250372" y="381391"/>
-            <a:ext cx="6444343" cy="369332"/>
-          </a:xfrm>
-          <a:prstGeom prst="rect">
-            <a:avLst/>
-          </a:prstGeom>
-          <a:noFill/>
-        </p:spPr>
-        <p:txBody>
-          <a:bodyPr wrap="square" rtlCol="0">
-            <a:spAutoFit/>
-          </a:bodyPr>
-          <a:lstStyle/>
-          <a:p>
-            <a:r>
-              <a:rPr lang="en-IN" b="1" dirty="0">
-                <a:solidFill>
-                  <a:srgbClr val="FF0000"/>
-                </a:solidFill>
-              </a:rPr>
-              <a:t>Folder Structure(</a:t>
-            </a:r>
-            <a:r>
-              <a:rPr lang="en-IN" b="1" dirty="0" err="1">
-                <a:solidFill>
-                  <a:srgbClr val="FF0000"/>
-                </a:solidFill>
-              </a:rPr>
-              <a:t>Framwork</a:t>
-            </a:r>
-            <a:r>
-              <a:rPr lang="en-IN" b="1" dirty="0">
-                <a:solidFill>
-                  <a:srgbClr val="FF0000"/>
-                </a:solidFill>
-              </a:rPr>
-              <a:t>)</a:t>
-            </a:r>
-          </a:p>
-        </p:txBody>
-      </p:sp>
-    </p:spTree>
-    <p:extLst>
-      <p:ext uri="{BB962C8B-B14F-4D97-AF65-F5344CB8AC3E}">
-        <p14:creationId xmlns:p14="http://schemas.microsoft.com/office/powerpoint/2010/main" val="4162541684"/>
-      </p:ext>
-    </p:extLst>
-  </p:cSld>
-  <p:clrMapOvr>
-    <a:masterClrMapping/>
-  </p:clrMapOvr>
-</p:sld>
-</file>
-
-<file path=ppt/slides/slide7.xml><?xml version="1.0" encoding="utf-8"?>
-<p:sld xmlns:a="http://schemas.openxmlformats.org/drawingml/2006/main" xmlns:r="http://schemas.openxmlformats.org/officeDocument/2006/relationships" xmlns:p="http://schemas.openxmlformats.org/presentationml/2006/main">
-  <p:cSld>
-    <p:spTree>
-      <p:nvGrpSpPr>
-        <p:cNvPr id="1" name=""/>
-        <p:cNvGrpSpPr/>
-        <p:nvPr/>
-      </p:nvGrpSpPr>
-      <p:grpSpPr>
-        <a:xfrm>
-          <a:off x="0" y="0"/>
-          <a:ext cx="0" cy="0"/>
-          <a:chOff x="0" y="0"/>
-          <a:chExt cx="0" cy="0"/>
-        </a:xfrm>
-      </p:grpSpPr>
-      <p:pic>
-        <p:nvPicPr>
-          <p:cNvPr id="13" name="Picture 12">
-            <a:extLst>
-              <a:ext uri="{FF2B5EF4-FFF2-40B4-BE49-F238E27FC236}">
-                <a16:creationId xmlns:a16="http://schemas.microsoft.com/office/drawing/2014/main" id="{0FB1E411-FD58-AF95-FE9A-44ABE6592ACD}"/>
-              </a:ext>
-            </a:extLst>
-          </p:cNvPr>
-          <p:cNvPicPr>
-            <a:picLocks noChangeAspect="1"/>
-          </p:cNvPicPr>
-          <p:nvPr/>
-        </p:nvPicPr>
-        <p:blipFill>
-          <a:blip r:embed="rId2"/>
-          <a:stretch>
-            <a:fillRect/>
-          </a:stretch>
-        </p:blipFill>
-        <p:spPr>
-          <a:xfrm>
-            <a:off x="5505839" y="588720"/>
-            <a:ext cx="4489710" cy="3810560"/>
-          </a:xfrm>
-          <a:prstGeom prst="rect">
-            <a:avLst/>
-          </a:prstGeom>
-        </p:spPr>
-      </p:pic>
-      <p:pic>
-        <p:nvPicPr>
-          <p:cNvPr id="15" name="Picture 14">
-            <a:extLst>
-              <a:ext uri="{FF2B5EF4-FFF2-40B4-BE49-F238E27FC236}">
-                <a16:creationId xmlns:a16="http://schemas.microsoft.com/office/drawing/2014/main" id="{CD8162E5-D3F8-5202-2FF3-E0074AA16181}"/>
-              </a:ext>
-            </a:extLst>
-          </p:cNvPr>
-          <p:cNvPicPr>
-            <a:picLocks noChangeAspect="1"/>
-          </p:cNvPicPr>
-          <p:nvPr/>
-        </p:nvPicPr>
-        <p:blipFill>
-          <a:blip r:embed="rId3"/>
-          <a:stretch>
-            <a:fillRect/>
-          </a:stretch>
-        </p:blipFill>
-        <p:spPr>
-          <a:xfrm>
-            <a:off x="2820063" y="4555996"/>
-            <a:ext cx="4123982" cy="2166727"/>
-          </a:xfrm>
-          <a:prstGeom prst="rect">
-            <a:avLst/>
-          </a:prstGeom>
-        </p:spPr>
-      </p:pic>
-      <p:pic>
-        <p:nvPicPr>
-          <p:cNvPr id="11" name="Picture 10">
-            <a:extLst>
-              <a:ext uri="{FF2B5EF4-FFF2-40B4-BE49-F238E27FC236}">
-                <a16:creationId xmlns:a16="http://schemas.microsoft.com/office/drawing/2014/main" id="{80DF01A4-077F-90E9-C6CD-3BED07953E6F}"/>
-              </a:ext>
-            </a:extLst>
-          </p:cNvPr>
-          <p:cNvPicPr>
-            <a:picLocks noChangeAspect="1"/>
-          </p:cNvPicPr>
-          <p:nvPr/>
-        </p:nvPicPr>
-        <p:blipFill>
-          <a:blip r:embed="rId4"/>
-          <a:stretch>
-            <a:fillRect/>
-          </a:stretch>
-        </p:blipFill>
-        <p:spPr>
-          <a:xfrm>
-            <a:off x="223588" y="588720"/>
-            <a:ext cx="4423585" cy="3810560"/>
+            <a:off x="3362184" y="358617"/>
+            <a:ext cx="5467631" cy="6140766"/>
           </a:xfrm>
           <a:prstGeom prst="rect">
             <a:avLst/>
@@ -11272,7 +8041,7 @@
 </p:sld>
 </file>
 
-<file path=ppt/slides/slide8.xml><?xml version="1.0" encoding="utf-8"?>
+<file path=ppt/slides/slide7.xml><?xml version="1.0" encoding="utf-8"?>
 <p:sld xmlns:a="http://schemas.openxmlformats.org/drawingml/2006/main" xmlns:r="http://schemas.openxmlformats.org/officeDocument/2006/relationships" xmlns:p="http://schemas.openxmlformats.org/presentationml/2006/main">
   <p:cSld name="Slide 5">
     <p:bg>
@@ -12734,7 +9503,7 @@
 </p:sld>
 </file>
 
-<file path=ppt/slides/slide9.xml><?xml version="1.0" encoding="utf-8"?>
+<file path=ppt/slides/slide8.xml><?xml version="1.0" encoding="utf-8"?>
 <p:sld xmlns:a="http://schemas.openxmlformats.org/drawingml/2006/main" xmlns:r="http://schemas.openxmlformats.org/officeDocument/2006/relationships" xmlns:p="http://schemas.openxmlformats.org/presentationml/2006/main">
   <p:cSld name="Slide 6">
     <p:bg>
@@ -13243,6 +10012,1257 @@
                 <a:cs typeface="Calibri" pitchFamily="34" charset="-120"/>
               </a:rPr>
               <a:t>06</a:t>
+            </a:r>
+            <a:endParaRPr lang="en-US" sz="1100" dirty="0"/>
+          </a:p>
+        </p:txBody>
+      </p:sp>
+    </p:spTree>
+  </p:cSld>
+  <p:clrMapOvr>
+    <a:masterClrMapping/>
+  </p:clrMapOvr>
+</p:sld>
+</file>
+
+<file path=ppt/slides/slide9.xml><?xml version="1.0" encoding="utf-8"?>
+<p:sld xmlns:a="http://schemas.openxmlformats.org/drawingml/2006/main" xmlns:r="http://schemas.openxmlformats.org/officeDocument/2006/relationships" xmlns:p="http://schemas.openxmlformats.org/presentationml/2006/main">
+  <p:cSld name="Slide 8">
+    <p:bg>
+      <p:bgPr>
+        <a:solidFill>
+          <a:srgbClr val="FFFFFF"/>
+        </a:solidFill>
+        <a:effectLst/>
+      </p:bgPr>
+    </p:bg>
+    <p:spTree>
+      <p:nvGrpSpPr>
+        <p:cNvPr id="1" name=""/>
+        <p:cNvGrpSpPr/>
+        <p:nvPr/>
+      </p:nvGrpSpPr>
+      <p:grpSpPr>
+        <a:xfrm>
+          <a:off x="0" y="0"/>
+          <a:ext cx="0" cy="0"/>
+          <a:chOff x="0" y="0"/>
+          <a:chExt cx="0" cy="0"/>
+        </a:xfrm>
+      </p:grpSpPr>
+      <p:sp>
+        <p:nvSpPr>
+          <p:cNvPr id="2" name="Text 0"/>
+          <p:cNvSpPr/>
+          <p:nvPr/>
+        </p:nvSpPr>
+        <p:spPr>
+          <a:xfrm>
+            <a:off x="548640" y="384048"/>
+            <a:ext cx="9144000" cy="320040"/>
+          </a:xfrm>
+          <a:prstGeom prst="rect">
+            <a:avLst/>
+          </a:prstGeom>
+          <a:noFill/>
+          <a:ln/>
+        </p:spPr>
+        <p:txBody>
+          <a:bodyPr wrap="square" rtlCol="0" anchor="ctr"/>
+          <a:lstStyle/>
+          <a:p>
+            <a:pPr marL="0" indent="0">
+              <a:buNone/>
+            </a:pPr>
+            <a:r>
+              <a:rPr lang="en-US" sz="1300" b="1" kern="0" spc="200" dirty="0">
+                <a:solidFill>
+                  <a:srgbClr val="1E2761"/>
+                </a:solidFill>
+                <a:latin typeface="Calibri" pitchFamily="34" charset="0"/>
+                <a:ea typeface="Calibri" pitchFamily="34" charset="-122"/>
+                <a:cs typeface="Calibri" pitchFamily="34" charset="-120"/>
+              </a:rPr>
+              <a:t>GITHUB ACTIONS</a:t>
+            </a:r>
+            <a:endParaRPr lang="en-US" sz="1300" dirty="0"/>
+          </a:p>
+        </p:txBody>
+      </p:sp>
+      <p:sp>
+        <p:nvSpPr>
+          <p:cNvPr id="3" name="Text 1"/>
+          <p:cNvSpPr/>
+          <p:nvPr/>
+        </p:nvSpPr>
+        <p:spPr>
+          <a:xfrm>
+            <a:off x="548640" y="685800"/>
+            <a:ext cx="11064240" cy="777240"/>
+          </a:xfrm>
+          <a:prstGeom prst="rect">
+            <a:avLst/>
+          </a:prstGeom>
+          <a:noFill/>
+          <a:ln/>
+        </p:spPr>
+        <p:txBody>
+          <a:bodyPr wrap="square" rtlCol="0" anchor="ctr"/>
+          <a:lstStyle/>
+          <a:p>
+            <a:pPr marL="0" indent="0">
+              <a:buNone/>
+            </a:pPr>
+            <a:r>
+              <a:rPr lang="en-US" sz="3200" b="1" dirty="0">
+                <a:solidFill>
+                  <a:srgbClr val="1E2761"/>
+                </a:solidFill>
+                <a:latin typeface="Cambria" pitchFamily="34" charset="0"/>
+                <a:ea typeface="Cambria" pitchFamily="34" charset="-122"/>
+                <a:cs typeface="Cambria" pitchFamily="34" charset="-120"/>
+              </a:rPr>
+              <a:t>From Push To Published Report</a:t>
+            </a:r>
+            <a:endParaRPr lang="en-US" sz="3200" dirty="0"/>
+          </a:p>
+        </p:txBody>
+      </p:sp>
+      <p:sp>
+        <p:nvSpPr>
+          <p:cNvPr id="4" name="Shape 2"/>
+          <p:cNvSpPr/>
+          <p:nvPr/>
+        </p:nvSpPr>
+        <p:spPr>
+          <a:xfrm>
+            <a:off x="548640" y="1783080"/>
+            <a:ext cx="1691640" cy="1143000"/>
+          </a:xfrm>
+          <a:prstGeom prst="roundRect">
+            <a:avLst>
+              <a:gd name="adj" fmla="val 8000"/>
+            </a:avLst>
+          </a:prstGeom>
+          <a:solidFill>
+            <a:srgbClr val="F4F7FC"/>
+          </a:solidFill>
+          <a:ln w="19050">
+            <a:solidFill>
+              <a:srgbClr val="1E2761"/>
+            </a:solidFill>
+            <a:prstDash val="solid"/>
+          </a:ln>
+        </p:spPr>
+        <p:txBody>
+          <a:bodyPr/>
+          <a:lstStyle/>
+          <a:p>
+            <a:endParaRPr lang="en-IN"/>
+          </a:p>
+        </p:txBody>
+      </p:sp>
+      <p:sp>
+        <p:nvSpPr>
+          <p:cNvPr id="5" name="Text 3"/>
+          <p:cNvSpPr/>
+          <p:nvPr/>
+        </p:nvSpPr>
+        <p:spPr>
+          <a:xfrm>
+            <a:off x="548640" y="1783080"/>
+            <a:ext cx="1691640" cy="1143000"/>
+          </a:xfrm>
+          <a:prstGeom prst="rect">
+            <a:avLst/>
+          </a:prstGeom>
+          <a:noFill/>
+          <a:ln/>
+        </p:spPr>
+        <p:txBody>
+          <a:bodyPr wrap="square" lIns="0" tIns="0" rIns="0" bIns="0" rtlCol="0" anchor="ctr"/>
+          <a:lstStyle/>
+          <a:p>
+            <a:pPr marL="0" indent="0" algn="ctr">
+              <a:lnSpc>
+                <a:spcPct val="115000"/>
+              </a:lnSpc>
+              <a:buNone/>
+            </a:pPr>
+            <a:r>
+              <a:rPr lang="en-US" sz="1100" b="1" dirty="0">
+                <a:solidFill>
+                  <a:srgbClr val="1E2761"/>
+                </a:solidFill>
+                <a:latin typeface="Calibri" pitchFamily="34" charset="0"/>
+                <a:ea typeface="Calibri" pitchFamily="34" charset="-122"/>
+                <a:cs typeface="Calibri" pitchFamily="34" charset="-120"/>
+              </a:rPr>
+              <a:t>Checkout +</a:t>
+            </a:r>
+            <a:endParaRPr lang="en-US" sz="1100" dirty="0"/>
+          </a:p>
+          <a:p>
+            <a:pPr marL="0" indent="0" algn="ctr">
+              <a:lnSpc>
+                <a:spcPct val="115000"/>
+              </a:lnSpc>
+              <a:buNone/>
+            </a:pPr>
+            <a:r>
+              <a:rPr lang="en-US" sz="1100" b="1" dirty="0">
+                <a:solidFill>
+                  <a:srgbClr val="1E2761"/>
+                </a:solidFill>
+                <a:latin typeface="Calibri" pitchFamily="34" charset="0"/>
+                <a:ea typeface="Calibri" pitchFamily="34" charset="-122"/>
+                <a:cs typeface="Calibri" pitchFamily="34" charset="-120"/>
+              </a:rPr>
+              <a:t>Setup JDK 22</a:t>
+            </a:r>
+            <a:endParaRPr lang="en-US" sz="1100" dirty="0"/>
+          </a:p>
+        </p:txBody>
+      </p:sp>
+      <p:sp>
+        <p:nvSpPr>
+          <p:cNvPr id="6" name="Text 4"/>
+          <p:cNvSpPr/>
+          <p:nvPr/>
+        </p:nvSpPr>
+        <p:spPr>
+          <a:xfrm>
+            <a:off x="2221992" y="1764792"/>
+            <a:ext cx="225491" cy="1143000"/>
+          </a:xfrm>
+          <a:prstGeom prst="rect">
+            <a:avLst/>
+          </a:prstGeom>
+          <a:noFill/>
+          <a:ln/>
+        </p:spPr>
+        <p:txBody>
+          <a:bodyPr wrap="square" lIns="0" tIns="0" rIns="0" bIns="0" rtlCol="0" anchor="ctr"/>
+          <a:lstStyle/>
+          <a:p>
+            <a:pPr marL="0" indent="0" algn="ctr">
+              <a:buNone/>
+            </a:pPr>
+            <a:r>
+              <a:rPr lang="en-US" sz="1800" b="1" dirty="0">
+                <a:solidFill>
+                  <a:srgbClr val="5A6B87"/>
+                </a:solidFill>
+                <a:latin typeface="Arial" pitchFamily="34" charset="0"/>
+                <a:ea typeface="Arial" pitchFamily="34" charset="-122"/>
+                <a:cs typeface="Arial" pitchFamily="34" charset="-120"/>
+              </a:rPr>
+              <a:t>→</a:t>
+            </a:r>
+            <a:endParaRPr lang="en-US" sz="1800" dirty="0"/>
+          </a:p>
+        </p:txBody>
+      </p:sp>
+      <p:sp>
+        <p:nvSpPr>
+          <p:cNvPr id="7" name="Shape 5"/>
+          <p:cNvSpPr/>
+          <p:nvPr/>
+        </p:nvSpPr>
+        <p:spPr>
+          <a:xfrm>
+            <a:off x="2429195" y="1783080"/>
+            <a:ext cx="1691640" cy="1143000"/>
+          </a:xfrm>
+          <a:prstGeom prst="roundRect">
+            <a:avLst>
+              <a:gd name="adj" fmla="val 8000"/>
+            </a:avLst>
+          </a:prstGeom>
+          <a:solidFill>
+            <a:srgbClr val="F4F7FC"/>
+          </a:solidFill>
+          <a:ln w="19050">
+            <a:solidFill>
+              <a:srgbClr val="1E2761"/>
+            </a:solidFill>
+            <a:prstDash val="solid"/>
+          </a:ln>
+        </p:spPr>
+        <p:txBody>
+          <a:bodyPr/>
+          <a:lstStyle/>
+          <a:p>
+            <a:endParaRPr lang="en-IN"/>
+          </a:p>
+        </p:txBody>
+      </p:sp>
+      <p:sp>
+        <p:nvSpPr>
+          <p:cNvPr id="8" name="Text 6"/>
+          <p:cNvSpPr/>
+          <p:nvPr/>
+        </p:nvSpPr>
+        <p:spPr>
+          <a:xfrm>
+            <a:off x="2429195" y="1783080"/>
+            <a:ext cx="1691640" cy="1143000"/>
+          </a:xfrm>
+          <a:prstGeom prst="rect">
+            <a:avLst/>
+          </a:prstGeom>
+          <a:noFill/>
+          <a:ln/>
+        </p:spPr>
+        <p:txBody>
+          <a:bodyPr wrap="square" lIns="0" tIns="0" rIns="0" bIns="0" rtlCol="0" anchor="ctr"/>
+          <a:lstStyle/>
+          <a:p>
+            <a:pPr marL="0" indent="0" algn="ctr">
+              <a:lnSpc>
+                <a:spcPct val="115000"/>
+              </a:lnSpc>
+              <a:buNone/>
+            </a:pPr>
+            <a:r>
+              <a:rPr lang="en-US" sz="1100" b="1" dirty="0">
+                <a:solidFill>
+                  <a:srgbClr val="1E2761"/>
+                </a:solidFill>
+                <a:latin typeface="Calibri" pitchFamily="34" charset="0"/>
+                <a:ea typeface="Calibri" pitchFamily="34" charset="-122"/>
+                <a:cs typeface="Calibri" pitchFamily="34" charset="-120"/>
+              </a:rPr>
+              <a:t>Start MySQL</a:t>
+            </a:r>
+            <a:endParaRPr lang="en-US" sz="1100" dirty="0"/>
+          </a:p>
+          <a:p>
+            <a:pPr marL="0" indent="0" algn="ctr">
+              <a:lnSpc>
+                <a:spcPct val="115000"/>
+              </a:lnSpc>
+              <a:buNone/>
+            </a:pPr>
+            <a:r>
+              <a:rPr lang="en-US" sz="1100" b="1" dirty="0">
+                <a:solidFill>
+                  <a:srgbClr val="1E2761"/>
+                </a:solidFill>
+                <a:latin typeface="Calibri" pitchFamily="34" charset="0"/>
+                <a:ea typeface="Calibri" pitchFamily="34" charset="-122"/>
+                <a:cs typeface="Calibri" pitchFamily="34" charset="-120"/>
+              </a:rPr>
+              <a:t>Service</a:t>
+            </a:r>
+            <a:endParaRPr lang="en-US" sz="1100" dirty="0"/>
+          </a:p>
+        </p:txBody>
+      </p:sp>
+      <p:sp>
+        <p:nvSpPr>
+          <p:cNvPr id="9" name="Text 7"/>
+          <p:cNvSpPr/>
+          <p:nvPr/>
+        </p:nvSpPr>
+        <p:spPr>
+          <a:xfrm>
+            <a:off x="4102547" y="1764792"/>
+            <a:ext cx="225491" cy="1143000"/>
+          </a:xfrm>
+          <a:prstGeom prst="rect">
+            <a:avLst/>
+          </a:prstGeom>
+          <a:noFill/>
+          <a:ln/>
+        </p:spPr>
+        <p:txBody>
+          <a:bodyPr wrap="square" lIns="0" tIns="0" rIns="0" bIns="0" rtlCol="0" anchor="ctr"/>
+          <a:lstStyle/>
+          <a:p>
+            <a:pPr marL="0" indent="0" algn="ctr">
+              <a:buNone/>
+            </a:pPr>
+            <a:r>
+              <a:rPr lang="en-US" sz="1800" b="1" dirty="0">
+                <a:solidFill>
+                  <a:srgbClr val="5A6B87"/>
+                </a:solidFill>
+                <a:latin typeface="Arial" pitchFamily="34" charset="0"/>
+                <a:ea typeface="Arial" pitchFamily="34" charset="-122"/>
+                <a:cs typeface="Arial" pitchFamily="34" charset="-120"/>
+              </a:rPr>
+              <a:t>→</a:t>
+            </a:r>
+            <a:endParaRPr lang="en-US" sz="1800" dirty="0"/>
+          </a:p>
+        </p:txBody>
+      </p:sp>
+      <p:sp>
+        <p:nvSpPr>
+          <p:cNvPr id="10" name="Shape 8"/>
+          <p:cNvSpPr/>
+          <p:nvPr/>
+        </p:nvSpPr>
+        <p:spPr>
+          <a:xfrm>
+            <a:off x="4309750" y="1783080"/>
+            <a:ext cx="1691640" cy="1143000"/>
+          </a:xfrm>
+          <a:prstGeom prst="roundRect">
+            <a:avLst>
+              <a:gd name="adj" fmla="val 8000"/>
+            </a:avLst>
+          </a:prstGeom>
+          <a:solidFill>
+            <a:srgbClr val="F4F7FC"/>
+          </a:solidFill>
+          <a:ln w="19050">
+            <a:solidFill>
+              <a:srgbClr val="F2C14E"/>
+            </a:solidFill>
+            <a:prstDash val="solid"/>
+          </a:ln>
+        </p:spPr>
+        <p:txBody>
+          <a:bodyPr/>
+          <a:lstStyle/>
+          <a:p>
+            <a:endParaRPr lang="en-IN"/>
+          </a:p>
+        </p:txBody>
+      </p:sp>
+      <p:sp>
+        <p:nvSpPr>
+          <p:cNvPr id="11" name="Text 9"/>
+          <p:cNvSpPr/>
+          <p:nvPr/>
+        </p:nvSpPr>
+        <p:spPr>
+          <a:xfrm>
+            <a:off x="4309750" y="1783080"/>
+            <a:ext cx="1691640" cy="1143000"/>
+          </a:xfrm>
+          <a:prstGeom prst="rect">
+            <a:avLst/>
+          </a:prstGeom>
+          <a:noFill/>
+          <a:ln/>
+        </p:spPr>
+        <p:txBody>
+          <a:bodyPr wrap="square" lIns="0" tIns="0" rIns="0" bIns="0" rtlCol="0" anchor="ctr"/>
+          <a:lstStyle/>
+          <a:p>
+            <a:pPr marL="0" indent="0" algn="ctr">
+              <a:lnSpc>
+                <a:spcPct val="115000"/>
+              </a:lnSpc>
+              <a:buNone/>
+            </a:pPr>
+            <a:r>
+              <a:rPr lang="en-US" sz="1100" b="1" dirty="0">
+                <a:solidFill>
+                  <a:srgbClr val="1E2761"/>
+                </a:solidFill>
+                <a:latin typeface="Calibri" pitchFamily="34" charset="0"/>
+                <a:ea typeface="Calibri" pitchFamily="34" charset="-122"/>
+                <a:cs typeface="Calibri" pitchFamily="34" charset="-120"/>
+              </a:rPr>
+              <a:t>./gradlew test</a:t>
+            </a:r>
+            <a:endParaRPr lang="en-US" sz="1100" dirty="0"/>
+          </a:p>
+          <a:p>
+            <a:pPr marL="0" indent="0" algn="ctr">
+              <a:lnSpc>
+                <a:spcPct val="115000"/>
+              </a:lnSpc>
+              <a:buNone/>
+            </a:pPr>
+            <a:r>
+              <a:rPr lang="en-US" sz="1100" b="1" dirty="0">
+                <a:solidFill>
+                  <a:srgbClr val="1E2761"/>
+                </a:solidFill>
+                <a:latin typeface="Calibri" pitchFamily="34" charset="0"/>
+                <a:ea typeface="Calibri" pitchFamily="34" charset="-122"/>
+                <a:cs typeface="Calibri" pitchFamily="34" charset="-120"/>
+              </a:rPr>
+              <a:t>(maxParallelForks=1)</a:t>
+            </a:r>
+            <a:endParaRPr lang="en-US" sz="1100" dirty="0"/>
+          </a:p>
+        </p:txBody>
+      </p:sp>
+      <p:sp>
+        <p:nvSpPr>
+          <p:cNvPr id="12" name="Text 10"/>
+          <p:cNvSpPr/>
+          <p:nvPr/>
+        </p:nvSpPr>
+        <p:spPr>
+          <a:xfrm>
+            <a:off x="5983102" y="1764792"/>
+            <a:ext cx="225491" cy="1143000"/>
+          </a:xfrm>
+          <a:prstGeom prst="rect">
+            <a:avLst/>
+          </a:prstGeom>
+          <a:noFill/>
+          <a:ln/>
+        </p:spPr>
+        <p:txBody>
+          <a:bodyPr wrap="square" lIns="0" tIns="0" rIns="0" bIns="0" rtlCol="0" anchor="ctr"/>
+          <a:lstStyle/>
+          <a:p>
+            <a:pPr marL="0" indent="0" algn="ctr">
+              <a:buNone/>
+            </a:pPr>
+            <a:r>
+              <a:rPr lang="en-US" sz="1800" b="1" dirty="0">
+                <a:solidFill>
+                  <a:srgbClr val="5A6B87"/>
+                </a:solidFill>
+                <a:latin typeface="Arial" pitchFamily="34" charset="0"/>
+                <a:ea typeface="Arial" pitchFamily="34" charset="-122"/>
+                <a:cs typeface="Arial" pitchFamily="34" charset="-120"/>
+              </a:rPr>
+              <a:t>→</a:t>
+            </a:r>
+            <a:endParaRPr lang="en-US" sz="1800" dirty="0"/>
+          </a:p>
+        </p:txBody>
+      </p:sp>
+      <p:sp>
+        <p:nvSpPr>
+          <p:cNvPr id="13" name="Shape 11"/>
+          <p:cNvSpPr/>
+          <p:nvPr/>
+        </p:nvSpPr>
+        <p:spPr>
+          <a:xfrm>
+            <a:off x="6190305" y="1783080"/>
+            <a:ext cx="1691640" cy="1143000"/>
+          </a:xfrm>
+          <a:prstGeom prst="roundRect">
+            <a:avLst>
+              <a:gd name="adj" fmla="val 8000"/>
+            </a:avLst>
+          </a:prstGeom>
+          <a:solidFill>
+            <a:srgbClr val="F4F7FC"/>
+          </a:solidFill>
+          <a:ln w="19050">
+            <a:solidFill>
+              <a:srgbClr val="F2C14E"/>
+            </a:solidFill>
+            <a:prstDash val="solid"/>
+          </a:ln>
+        </p:spPr>
+        <p:txBody>
+          <a:bodyPr/>
+          <a:lstStyle/>
+          <a:p>
+            <a:endParaRPr lang="en-IN"/>
+          </a:p>
+        </p:txBody>
+      </p:sp>
+      <p:sp>
+        <p:nvSpPr>
+          <p:cNvPr id="14" name="Text 12"/>
+          <p:cNvSpPr/>
+          <p:nvPr/>
+        </p:nvSpPr>
+        <p:spPr>
+          <a:xfrm>
+            <a:off x="6190305" y="1783080"/>
+            <a:ext cx="1691640" cy="1143000"/>
+          </a:xfrm>
+          <a:prstGeom prst="rect">
+            <a:avLst/>
+          </a:prstGeom>
+          <a:noFill/>
+          <a:ln/>
+        </p:spPr>
+        <p:txBody>
+          <a:bodyPr wrap="square" lIns="0" tIns="0" rIns="0" bIns="0" rtlCol="0" anchor="ctr"/>
+          <a:lstStyle/>
+          <a:p>
+            <a:pPr marL="0" indent="0" algn="ctr">
+              <a:lnSpc>
+                <a:spcPct val="115000"/>
+              </a:lnSpc>
+              <a:buNone/>
+            </a:pPr>
+            <a:r>
+              <a:rPr lang="en-US" sz="1100" b="1" dirty="0">
+                <a:solidFill>
+                  <a:srgbClr val="1E2761"/>
+                </a:solidFill>
+                <a:latin typeface="Calibri" pitchFamily="34" charset="0"/>
+                <a:ea typeface="Calibri" pitchFamily="34" charset="-122"/>
+                <a:cs typeface="Calibri" pitchFamily="34" charset="-120"/>
+              </a:rPr>
+              <a:t>Verify Allure</a:t>
+            </a:r>
+            <a:endParaRPr lang="en-US" sz="1100" dirty="0"/>
+          </a:p>
+          <a:p>
+            <a:pPr marL="0" indent="0" algn="ctr">
+              <a:lnSpc>
+                <a:spcPct val="115000"/>
+              </a:lnSpc>
+              <a:buNone/>
+            </a:pPr>
+            <a:r>
+              <a:rPr lang="en-US" sz="1100" b="1" dirty="0">
+                <a:solidFill>
+                  <a:srgbClr val="1E2761"/>
+                </a:solidFill>
+                <a:latin typeface="Calibri" pitchFamily="34" charset="0"/>
+                <a:ea typeface="Calibri" pitchFamily="34" charset="-122"/>
+                <a:cs typeface="Calibri" pitchFamily="34" charset="-120"/>
+              </a:rPr>
+              <a:t>Results Exist</a:t>
+            </a:r>
+            <a:endParaRPr lang="en-US" sz="1100" dirty="0"/>
+          </a:p>
+        </p:txBody>
+      </p:sp>
+      <p:sp>
+        <p:nvSpPr>
+          <p:cNvPr id="15" name="Text 13"/>
+          <p:cNvSpPr/>
+          <p:nvPr/>
+        </p:nvSpPr>
+        <p:spPr>
+          <a:xfrm>
+            <a:off x="7863657" y="1764792"/>
+            <a:ext cx="225491" cy="1143000"/>
+          </a:xfrm>
+          <a:prstGeom prst="rect">
+            <a:avLst/>
+          </a:prstGeom>
+          <a:noFill/>
+          <a:ln/>
+        </p:spPr>
+        <p:txBody>
+          <a:bodyPr wrap="square" lIns="0" tIns="0" rIns="0" bIns="0" rtlCol="0" anchor="ctr"/>
+          <a:lstStyle/>
+          <a:p>
+            <a:pPr marL="0" indent="0" algn="ctr">
+              <a:buNone/>
+            </a:pPr>
+            <a:r>
+              <a:rPr lang="en-US" sz="1800" b="1" dirty="0">
+                <a:solidFill>
+                  <a:srgbClr val="5A6B87"/>
+                </a:solidFill>
+                <a:latin typeface="Arial" pitchFamily="34" charset="0"/>
+                <a:ea typeface="Arial" pitchFamily="34" charset="-122"/>
+                <a:cs typeface="Arial" pitchFamily="34" charset="-120"/>
+              </a:rPr>
+              <a:t>→</a:t>
+            </a:r>
+            <a:endParaRPr lang="en-US" sz="1800" dirty="0"/>
+          </a:p>
+        </p:txBody>
+      </p:sp>
+      <p:sp>
+        <p:nvSpPr>
+          <p:cNvPr id="16" name="Shape 14"/>
+          <p:cNvSpPr/>
+          <p:nvPr/>
+        </p:nvSpPr>
+        <p:spPr>
+          <a:xfrm>
+            <a:off x="8070860" y="1783080"/>
+            <a:ext cx="1691640" cy="1143000"/>
+          </a:xfrm>
+          <a:prstGeom prst="roundRect">
+            <a:avLst>
+              <a:gd name="adj" fmla="val 8000"/>
+            </a:avLst>
+          </a:prstGeom>
+          <a:solidFill>
+            <a:srgbClr val="F4F7FC"/>
+          </a:solidFill>
+          <a:ln w="19050">
+            <a:solidFill>
+              <a:srgbClr val="2FA36B"/>
+            </a:solidFill>
+            <a:prstDash val="solid"/>
+          </a:ln>
+        </p:spPr>
+        <p:txBody>
+          <a:bodyPr/>
+          <a:lstStyle/>
+          <a:p>
+            <a:endParaRPr lang="en-IN"/>
+          </a:p>
+        </p:txBody>
+      </p:sp>
+      <p:sp>
+        <p:nvSpPr>
+          <p:cNvPr id="17" name="Text 15"/>
+          <p:cNvSpPr/>
+          <p:nvPr/>
+        </p:nvSpPr>
+        <p:spPr>
+          <a:xfrm>
+            <a:off x="8070860" y="1783080"/>
+            <a:ext cx="1691640" cy="1143000"/>
+          </a:xfrm>
+          <a:prstGeom prst="rect">
+            <a:avLst/>
+          </a:prstGeom>
+          <a:noFill/>
+          <a:ln/>
+        </p:spPr>
+        <p:txBody>
+          <a:bodyPr wrap="square" lIns="0" tIns="0" rIns="0" bIns="0" rtlCol="0" anchor="ctr"/>
+          <a:lstStyle/>
+          <a:p>
+            <a:pPr marL="0" indent="0" algn="ctr">
+              <a:lnSpc>
+                <a:spcPct val="115000"/>
+              </a:lnSpc>
+              <a:buNone/>
+            </a:pPr>
+            <a:r>
+              <a:rPr lang="en-US" sz="1100" b="1" dirty="0">
+                <a:solidFill>
+                  <a:srgbClr val="1E2761"/>
+                </a:solidFill>
+                <a:latin typeface="Calibri" pitchFamily="34" charset="0"/>
+                <a:ea typeface="Calibri" pitchFamily="34" charset="-122"/>
+                <a:cs typeface="Calibri" pitchFamily="34" charset="-120"/>
+              </a:rPr>
+              <a:t>Build Report</a:t>
+            </a:r>
+            <a:endParaRPr lang="en-US" sz="1100" dirty="0"/>
+          </a:p>
+          <a:p>
+            <a:pPr marL="0" indent="0" algn="ctr">
+              <a:lnSpc>
+                <a:spcPct val="115000"/>
+              </a:lnSpc>
+              <a:buNone/>
+            </a:pPr>
+            <a:r>
+              <a:rPr lang="en-US" sz="1100" b="1" dirty="0">
+                <a:solidFill>
+                  <a:srgbClr val="1E2761"/>
+                </a:solidFill>
+                <a:latin typeface="Calibri" pitchFamily="34" charset="0"/>
+                <a:ea typeface="Calibri" pitchFamily="34" charset="-122"/>
+                <a:cs typeface="Calibri" pitchFamily="34" charset="-120"/>
+              </a:rPr>
+              <a:t>+ History</a:t>
+            </a:r>
+            <a:endParaRPr lang="en-US" sz="1100" dirty="0"/>
+          </a:p>
+        </p:txBody>
+      </p:sp>
+      <p:sp>
+        <p:nvSpPr>
+          <p:cNvPr id="18" name="Text 16"/>
+          <p:cNvSpPr/>
+          <p:nvPr/>
+        </p:nvSpPr>
+        <p:spPr>
+          <a:xfrm>
+            <a:off x="9744212" y="1764792"/>
+            <a:ext cx="225491" cy="1143000"/>
+          </a:xfrm>
+          <a:prstGeom prst="rect">
+            <a:avLst/>
+          </a:prstGeom>
+          <a:noFill/>
+          <a:ln/>
+        </p:spPr>
+        <p:txBody>
+          <a:bodyPr wrap="square" lIns="0" tIns="0" rIns="0" bIns="0" rtlCol="0" anchor="ctr"/>
+          <a:lstStyle/>
+          <a:p>
+            <a:pPr marL="0" indent="0" algn="ctr">
+              <a:buNone/>
+            </a:pPr>
+            <a:r>
+              <a:rPr lang="en-US" sz="1800" b="1" dirty="0">
+                <a:solidFill>
+                  <a:srgbClr val="5A6B87"/>
+                </a:solidFill>
+                <a:latin typeface="Arial" pitchFamily="34" charset="0"/>
+                <a:ea typeface="Arial" pitchFamily="34" charset="-122"/>
+                <a:cs typeface="Arial" pitchFamily="34" charset="-120"/>
+              </a:rPr>
+              <a:t>→</a:t>
+            </a:r>
+            <a:endParaRPr lang="en-US" sz="1800" dirty="0"/>
+          </a:p>
+        </p:txBody>
+      </p:sp>
+      <p:sp>
+        <p:nvSpPr>
+          <p:cNvPr id="19" name="Shape 17"/>
+          <p:cNvSpPr/>
+          <p:nvPr/>
+        </p:nvSpPr>
+        <p:spPr>
+          <a:xfrm>
+            <a:off x="9951415" y="1783080"/>
+            <a:ext cx="1691640" cy="1143000"/>
+          </a:xfrm>
+          <a:prstGeom prst="roundRect">
+            <a:avLst>
+              <a:gd name="adj" fmla="val 8000"/>
+            </a:avLst>
+          </a:prstGeom>
+          <a:solidFill>
+            <a:srgbClr val="F4F7FC"/>
+          </a:solidFill>
+          <a:ln w="19050">
+            <a:solidFill>
+              <a:srgbClr val="2FA36B"/>
+            </a:solidFill>
+            <a:prstDash val="solid"/>
+          </a:ln>
+        </p:spPr>
+        <p:txBody>
+          <a:bodyPr/>
+          <a:lstStyle/>
+          <a:p>
+            <a:endParaRPr lang="en-IN"/>
+          </a:p>
+        </p:txBody>
+      </p:sp>
+      <p:sp>
+        <p:nvSpPr>
+          <p:cNvPr id="20" name="Text 18"/>
+          <p:cNvSpPr/>
+          <p:nvPr/>
+        </p:nvSpPr>
+        <p:spPr>
+          <a:xfrm>
+            <a:off x="9951415" y="1783080"/>
+            <a:ext cx="1691640" cy="1143000"/>
+          </a:xfrm>
+          <a:prstGeom prst="rect">
+            <a:avLst/>
+          </a:prstGeom>
+          <a:noFill/>
+          <a:ln/>
+        </p:spPr>
+        <p:txBody>
+          <a:bodyPr wrap="square" lIns="0" tIns="0" rIns="0" bIns="0" rtlCol="0" anchor="ctr"/>
+          <a:lstStyle/>
+          <a:p>
+            <a:pPr marL="0" indent="0" algn="ctr">
+              <a:lnSpc>
+                <a:spcPct val="115000"/>
+              </a:lnSpc>
+              <a:buNone/>
+            </a:pPr>
+            <a:r>
+              <a:rPr lang="en-US" sz="1100" b="1" dirty="0">
+                <a:solidFill>
+                  <a:srgbClr val="1E2761"/>
+                </a:solidFill>
+                <a:latin typeface="Calibri" pitchFamily="34" charset="0"/>
+                <a:ea typeface="Calibri" pitchFamily="34" charset="-122"/>
+                <a:cs typeface="Calibri" pitchFamily="34" charset="-120"/>
+              </a:rPr>
+              <a:t>Publish to</a:t>
+            </a:r>
+            <a:endParaRPr lang="en-US" sz="1100" dirty="0"/>
+          </a:p>
+          <a:p>
+            <a:pPr marL="0" indent="0" algn="ctr">
+              <a:lnSpc>
+                <a:spcPct val="115000"/>
+              </a:lnSpc>
+              <a:buNone/>
+            </a:pPr>
+            <a:r>
+              <a:rPr lang="en-US" sz="1100" b="1" dirty="0">
+                <a:solidFill>
+                  <a:srgbClr val="1E2761"/>
+                </a:solidFill>
+                <a:latin typeface="Calibri" pitchFamily="34" charset="0"/>
+                <a:ea typeface="Calibri" pitchFamily="34" charset="-122"/>
+                <a:cs typeface="Calibri" pitchFamily="34" charset="-120"/>
+              </a:rPr>
+              <a:t>GitHub Pages</a:t>
+            </a:r>
+            <a:endParaRPr lang="en-US" sz="1100" dirty="0"/>
+          </a:p>
+        </p:txBody>
+      </p:sp>
+      <p:sp>
+        <p:nvSpPr>
+          <p:cNvPr id="21" name="Shape 19"/>
+          <p:cNvSpPr/>
+          <p:nvPr/>
+        </p:nvSpPr>
+        <p:spPr>
+          <a:xfrm>
+            <a:off x="548640" y="3291840"/>
+            <a:ext cx="3566160" cy="2148840"/>
+          </a:xfrm>
+          <a:prstGeom prst="roundRect">
+            <a:avLst>
+              <a:gd name="adj" fmla="val 4255"/>
+            </a:avLst>
+          </a:prstGeom>
+          <a:solidFill>
+            <a:srgbClr val="F4F7FC"/>
+          </a:solidFill>
+          <a:ln/>
+        </p:spPr>
+        <p:txBody>
+          <a:bodyPr/>
+          <a:lstStyle/>
+          <a:p>
+            <a:endParaRPr lang="en-IN"/>
+          </a:p>
+        </p:txBody>
+      </p:sp>
+      <p:sp>
+        <p:nvSpPr>
+          <p:cNvPr id="22" name="Text 20"/>
+          <p:cNvSpPr/>
+          <p:nvPr/>
+        </p:nvSpPr>
+        <p:spPr>
+          <a:xfrm>
+            <a:off x="777240" y="3493008"/>
+            <a:ext cx="3108960" cy="365760"/>
+          </a:xfrm>
+          <a:prstGeom prst="rect">
+            <a:avLst/>
+          </a:prstGeom>
+          <a:noFill/>
+          <a:ln/>
+        </p:spPr>
+        <p:txBody>
+          <a:bodyPr wrap="square" lIns="0" tIns="0" rIns="0" bIns="0" rtlCol="0" anchor="ctr"/>
+          <a:lstStyle/>
+          <a:p>
+            <a:pPr marL="0" indent="0">
+              <a:buNone/>
+            </a:pPr>
+            <a:r>
+              <a:rPr lang="en-US" sz="1350" b="1" dirty="0">
+                <a:solidFill>
+                  <a:srgbClr val="1E2761"/>
+                </a:solidFill>
+                <a:latin typeface="Calibri" pitchFamily="34" charset="0"/>
+                <a:ea typeface="Calibri" pitchFamily="34" charset="-122"/>
+                <a:cs typeface="Calibri" pitchFamily="34" charset="-120"/>
+              </a:rPr>
+              <a:t>Isolation matters</a:t>
+            </a:r>
+            <a:endParaRPr lang="en-US" sz="1350" dirty="0"/>
+          </a:p>
+        </p:txBody>
+      </p:sp>
+      <p:sp>
+        <p:nvSpPr>
+          <p:cNvPr id="23" name="Text 21"/>
+          <p:cNvSpPr/>
+          <p:nvPr/>
+        </p:nvSpPr>
+        <p:spPr>
+          <a:xfrm>
+            <a:off x="777240" y="3886200"/>
+            <a:ext cx="3108960" cy="1325880"/>
+          </a:xfrm>
+          <a:prstGeom prst="rect">
+            <a:avLst/>
+          </a:prstGeom>
+          <a:noFill/>
+          <a:ln/>
+        </p:spPr>
+        <p:txBody>
+          <a:bodyPr wrap="square" lIns="0" tIns="0" rIns="0" bIns="0" rtlCol="0" anchor="ctr"/>
+          <a:lstStyle/>
+          <a:p>
+            <a:pPr marL="0" indent="0">
+              <a:lnSpc>
+                <a:spcPct val="125000"/>
+              </a:lnSpc>
+              <a:buNone/>
+            </a:pPr>
+            <a:r>
+              <a:rPr lang="en-US" sz="1100" dirty="0">
+                <a:solidFill>
+                  <a:srgbClr val="5A6B87"/>
+                </a:solidFill>
+                <a:latin typeface="Calibri" pitchFamily="34" charset="0"/>
+                <a:ea typeface="Calibri" pitchFamily="34" charset="-122"/>
+                <a:cs typeface="Calibri" pitchFamily="34" charset="-120"/>
+              </a:rPr>
+              <a:t>maxParallelForks = 1 is set globally. With a shared MySQL instance, parallel forks caused real race-condition test failures — fixed once, applies to every future task.</a:t>
+            </a:r>
+            <a:endParaRPr lang="en-US" sz="1100" dirty="0"/>
+          </a:p>
+        </p:txBody>
+      </p:sp>
+      <p:sp>
+        <p:nvSpPr>
+          <p:cNvPr id="24" name="Shape 22"/>
+          <p:cNvSpPr/>
+          <p:nvPr/>
+        </p:nvSpPr>
+        <p:spPr>
+          <a:xfrm>
+            <a:off x="4370832" y="3291840"/>
+            <a:ext cx="3566160" cy="2148840"/>
+          </a:xfrm>
+          <a:prstGeom prst="roundRect">
+            <a:avLst>
+              <a:gd name="adj" fmla="val 4255"/>
+            </a:avLst>
+          </a:prstGeom>
+          <a:solidFill>
+            <a:srgbClr val="F4F7FC"/>
+          </a:solidFill>
+          <a:ln/>
+        </p:spPr>
+        <p:txBody>
+          <a:bodyPr/>
+          <a:lstStyle/>
+          <a:p>
+            <a:endParaRPr lang="en-IN"/>
+          </a:p>
+        </p:txBody>
+      </p:sp>
+      <p:sp>
+        <p:nvSpPr>
+          <p:cNvPr id="25" name="Text 23"/>
+          <p:cNvSpPr/>
+          <p:nvPr/>
+        </p:nvSpPr>
+        <p:spPr>
+          <a:xfrm>
+            <a:off x="4599432" y="3493008"/>
+            <a:ext cx="3108960" cy="365760"/>
+          </a:xfrm>
+          <a:prstGeom prst="rect">
+            <a:avLst/>
+          </a:prstGeom>
+          <a:noFill/>
+          <a:ln/>
+        </p:spPr>
+        <p:txBody>
+          <a:bodyPr wrap="square" lIns="0" tIns="0" rIns="0" bIns="0" rtlCol="0" anchor="ctr"/>
+          <a:lstStyle/>
+          <a:p>
+            <a:pPr marL="0" indent="0">
+              <a:buNone/>
+            </a:pPr>
+            <a:r>
+              <a:rPr lang="en-US" sz="1350" b="1" dirty="0">
+                <a:solidFill>
+                  <a:srgbClr val="1E2761"/>
+                </a:solidFill>
+                <a:latin typeface="Calibri" pitchFamily="34" charset="0"/>
+                <a:ea typeface="Calibri" pitchFamily="34" charset="-122"/>
+                <a:cs typeface="Calibri" pitchFamily="34" charset="-120"/>
+              </a:rPr>
+              <a:t>History that persists</a:t>
+            </a:r>
+            <a:endParaRPr lang="en-US" sz="1350" dirty="0"/>
+          </a:p>
+        </p:txBody>
+      </p:sp>
+      <p:sp>
+        <p:nvSpPr>
+          <p:cNvPr id="26" name="Text 24"/>
+          <p:cNvSpPr/>
+          <p:nvPr/>
+        </p:nvSpPr>
+        <p:spPr>
+          <a:xfrm>
+            <a:off x="4599432" y="3886200"/>
+            <a:ext cx="3108960" cy="1325880"/>
+          </a:xfrm>
+          <a:prstGeom prst="rect">
+            <a:avLst/>
+          </a:prstGeom>
+          <a:noFill/>
+          <a:ln/>
+        </p:spPr>
+        <p:txBody>
+          <a:bodyPr wrap="square" lIns="0" tIns="0" rIns="0" bIns="0" rtlCol="0" anchor="ctr"/>
+          <a:lstStyle/>
+          <a:p>
+            <a:pPr marL="0" indent="0">
+              <a:lnSpc>
+                <a:spcPct val="125000"/>
+              </a:lnSpc>
+              <a:buNone/>
+            </a:pPr>
+            <a:r>
+              <a:rPr lang="en-US" sz="1100" dirty="0">
+                <a:solidFill>
+                  <a:srgbClr val="5A6B87"/>
+                </a:solidFill>
+                <a:latin typeface="Calibri" pitchFamily="34" charset="0"/>
+                <a:ea typeface="Calibri" pitchFamily="34" charset="-122"/>
+                <a:cs typeface="Calibri" pitchFamily="34" charset="-120"/>
+              </a:rPr>
+              <a:t>gh-pages is checked out before the report builds, and simple-elf/allure-report-action merges old + new results so the Trend graph spans runs, not just one.</a:t>
+            </a:r>
+            <a:endParaRPr lang="en-US" sz="1100" dirty="0"/>
+          </a:p>
+        </p:txBody>
+      </p:sp>
+      <p:sp>
+        <p:nvSpPr>
+          <p:cNvPr id="27" name="Shape 25"/>
+          <p:cNvSpPr/>
+          <p:nvPr/>
+        </p:nvSpPr>
+        <p:spPr>
+          <a:xfrm>
+            <a:off x="8193024" y="3291840"/>
+            <a:ext cx="3566160" cy="2148840"/>
+          </a:xfrm>
+          <a:prstGeom prst="roundRect">
+            <a:avLst>
+              <a:gd name="adj" fmla="val 4255"/>
+            </a:avLst>
+          </a:prstGeom>
+          <a:solidFill>
+            <a:srgbClr val="F4F7FC"/>
+          </a:solidFill>
+          <a:ln/>
+        </p:spPr>
+        <p:txBody>
+          <a:bodyPr/>
+          <a:lstStyle/>
+          <a:p>
+            <a:endParaRPr lang="en-IN"/>
+          </a:p>
+        </p:txBody>
+      </p:sp>
+      <p:sp>
+        <p:nvSpPr>
+          <p:cNvPr id="28" name="Text 26"/>
+          <p:cNvSpPr/>
+          <p:nvPr/>
+        </p:nvSpPr>
+        <p:spPr>
+          <a:xfrm>
+            <a:off x="8421624" y="3493008"/>
+            <a:ext cx="3108960" cy="365760"/>
+          </a:xfrm>
+          <a:prstGeom prst="rect">
+            <a:avLst/>
+          </a:prstGeom>
+          <a:noFill/>
+          <a:ln/>
+        </p:spPr>
+        <p:txBody>
+          <a:bodyPr wrap="square" lIns="0" tIns="0" rIns="0" bIns="0" rtlCol="0" anchor="ctr"/>
+          <a:lstStyle/>
+          <a:p>
+            <a:pPr marL="0" indent="0">
+              <a:buNone/>
+            </a:pPr>
+            <a:r>
+              <a:rPr lang="en-US" sz="1350" b="1" dirty="0">
+                <a:solidFill>
+                  <a:srgbClr val="1E2761"/>
+                </a:solidFill>
+                <a:latin typeface="Calibri" pitchFamily="34" charset="0"/>
+                <a:ea typeface="Calibri" pitchFamily="34" charset="-122"/>
+                <a:cs typeface="Calibri" pitchFamily="34" charset="-120"/>
+              </a:rPr>
+              <a:t>A gotcha we hit</a:t>
+            </a:r>
+            <a:endParaRPr lang="en-US" sz="1350" dirty="0"/>
+          </a:p>
+        </p:txBody>
+      </p:sp>
+      <p:sp>
+        <p:nvSpPr>
+          <p:cNvPr id="29" name="Text 27"/>
+          <p:cNvSpPr/>
+          <p:nvPr/>
+        </p:nvSpPr>
+        <p:spPr>
+          <a:xfrm>
+            <a:off x="8421624" y="3886200"/>
+            <a:ext cx="3108960" cy="1325880"/>
+          </a:xfrm>
+          <a:prstGeom prst="rect">
+            <a:avLst/>
+          </a:prstGeom>
+          <a:noFill/>
+          <a:ln/>
+        </p:spPr>
+        <p:txBody>
+          <a:bodyPr wrap="square" lIns="0" tIns="0" rIns="0" bIns="0" rtlCol="0" anchor="ctr"/>
+          <a:lstStyle/>
+          <a:p>
+            <a:pPr marL="0" indent="0">
+              <a:lnSpc>
+                <a:spcPct val="125000"/>
+              </a:lnSpc>
+              <a:buNone/>
+            </a:pPr>
+            <a:r>
+              <a:rPr lang="en-US" sz="1100" dirty="0">
+                <a:solidFill>
+                  <a:srgbClr val="5A6B87"/>
+                </a:solidFill>
+                <a:latin typeface="Calibri" pitchFamily="34" charset="0"/>
+                <a:ea typeface="Calibri" pitchFamily="34" charset="-122"/>
+                <a:cs typeface="Calibri" pitchFamily="34" charset="-120"/>
+              </a:rPr>
+              <a:t>simple-elf's report action leaves a root-owned .git folder inside allure-history; peaceiris/actions-gh-pages can't clean it without sudo rm -rf — now handled explicitly.</a:t>
+            </a:r>
+            <a:endParaRPr lang="en-US" sz="1100" dirty="0"/>
+          </a:p>
+        </p:txBody>
+      </p:sp>
+      <p:sp>
+        <p:nvSpPr>
+          <p:cNvPr id="30" name="Text 28"/>
+          <p:cNvSpPr/>
+          <p:nvPr/>
+        </p:nvSpPr>
+        <p:spPr>
+          <a:xfrm>
+            <a:off x="11475720" y="6446520"/>
+            <a:ext cx="548640" cy="320040"/>
+          </a:xfrm>
+          <a:prstGeom prst="rect">
+            <a:avLst/>
+          </a:prstGeom>
+          <a:noFill/>
+          <a:ln/>
+        </p:spPr>
+        <p:txBody>
+          <a:bodyPr wrap="square" rtlCol="0" anchor="ctr"/>
+          <a:lstStyle/>
+          <a:p>
+            <a:pPr marL="0" indent="0" algn="r">
+              <a:buNone/>
+            </a:pPr>
+            <a:r>
+              <a:rPr lang="en-US" sz="1100" dirty="0">
+                <a:solidFill>
+                  <a:srgbClr val="5A6B87"/>
+                </a:solidFill>
+                <a:latin typeface="Calibri" pitchFamily="34" charset="0"/>
+                <a:ea typeface="Calibri" pitchFamily="34" charset="-122"/>
+                <a:cs typeface="Calibri" pitchFamily="34" charset="-120"/>
+              </a:rPr>
+              <a:t>08</a:t>
             </a:r>
             <a:endParaRPr lang="en-US" sz="1100" dirty="0"/>
           </a:p>
